--- a/docs/FraudShield_Deck.pptx
+++ b/docs/FraudShield_Deck.pptx
@@ -4,6 +4,9 @@
   <p:sldMasterIdLst>
     <p:sldMasterId id="2147483648" r:id="rId1"/>
   </p:sldMasterIdLst>
+  <p:notesMasterIdLst>
+    <p:notesMasterId r:id="rId14"/>
+  </p:notesMasterIdLst>
   <p:sldIdLst>
     <p:sldId id="256" r:id="rId2"/>
     <p:sldId id="257" r:id="rId3"/>
@@ -18,9 +21,6 @@
     <p:sldId id="266" r:id="rId12"/>
     <p:sldId id="267" r:id="rId13"/>
   </p:sldIdLst>
-  <p:notesMasterIdLst>
-    <p:notesMasterId r:id="rId14"/>
-  </p:notesMasterIdLst>
   <p:sldSz cx="12192000" cy="6858000"/>
   <p:notesSz cx="6858000" cy="12192000"/>
   <p:defaultTextStyle>
@@ -115,7 +115,41 @@
       </a:defRPr>
     </a:lvl9pPr>
   </p:defaultTextStyle>
+  <p:extLst>
+    <p:ext uri="{EFAFB233-063F-42B5-8137-9DF3F51BA10A}">
+      <p15:sldGuideLst xmlns:p15="http://schemas.microsoft.com/office/powerpoint/2012/main"/>
+    </p:ext>
+  </p:extLst>
 </p:presentation>
+</file>
+
+<file path=ppt/changesInfos/changesInfo1.xml><?xml version="1.0" encoding="utf-8"?>
+<pc:chgInfo xmlns:a="http://schemas.openxmlformats.org/drawingml/2006/main" xmlns:r="http://schemas.openxmlformats.org/officeDocument/2006/relationships" xmlns:ac="http://schemas.microsoft.com/office/drawing/2013/main/command" xmlns:pc="http://schemas.microsoft.com/office/powerpoint/2013/main/command">
+  <pc:docChgLst>
+    <pc:chgData name="Chhaya Gupta" userId="704dae89a0ce5714" providerId="LiveId" clId="{32F8D6CF-973F-497C-8744-E1CE6EA8D3FE}"/>
+    <pc:docChg chg="modSld">
+      <pc:chgData name="Chhaya Gupta" userId="704dae89a0ce5714" providerId="LiveId" clId="{32F8D6CF-973F-497C-8744-E1CE6EA8D3FE}" dt="2026-07-21T14:35:35.445" v="0" actId="20577"/>
+      <pc:docMkLst>
+        <pc:docMk/>
+      </pc:docMkLst>
+      <pc:sldChg chg="modSp mod">
+        <pc:chgData name="Chhaya Gupta" userId="704dae89a0ce5714" providerId="LiveId" clId="{32F8D6CF-973F-497C-8744-E1CE6EA8D3FE}" dt="2026-07-21T14:35:35.445" v="0" actId="20577"/>
+        <pc:sldMkLst>
+          <pc:docMk/>
+          <pc:sldMk cId="0" sldId="256"/>
+        </pc:sldMkLst>
+        <pc:spChg chg="mod">
+          <ac:chgData name="Chhaya Gupta" userId="704dae89a0ce5714" providerId="LiveId" clId="{32F8D6CF-973F-497C-8744-E1CE6EA8D3FE}" dt="2026-07-21T14:35:35.445" v="0" actId="20577"/>
+          <ac:spMkLst>
+            <pc:docMk/>
+            <pc:sldMk cId="0" sldId="256"/>
+            <ac:spMk id="3" creationId="{00000000-0000-0000-0000-000000000000}"/>
+          </ac:spMkLst>
+        </pc:spChg>
+      </pc:sldChg>
+    </pc:docChg>
+  </pc:docChgLst>
+</pc:chgInfo>
 </file>
 
 <file path=ppt/notesMasters/notesMaster1.xml><?xml version="1.0" encoding="utf-8"?>
@@ -140,234 +174,10 @@
           <a:chExt cx="0" cy="0"/>
         </a:xfrm>
       </p:grpSpPr>
-      <p:sp>
-        <p:nvSpPr>
-          <p:cNvPr id="2" name="Header Placeholder 1"/>
-          <p:cNvSpPr>
-            <a:spLocks noGrp="1"/>
-          </p:cNvSpPr>
-          <p:nvPr>
-            <p:ph type="hdr" sz="quarter"/>
-          </p:nvPr>
-        </p:nvSpPr>
-        <p:spPr>
-          <a:xfrm>
-            <a:off x="0" y="0"/>
-            <a:ext cx="2971800" cy="458788"/>
-          </a:xfrm>
-          <a:prstGeom prst="rect">
-            <a:avLst/>
-          </a:prstGeom>
-        </p:spPr>
-        <p:txBody>
-          <a:bodyPr vert="horz" lIns="91440" tIns="45720" rIns="91440" bIns="45720" rtlCol="0"/>
-          <a:lstStyle>
-            <a:lvl1pPr algn="l">
-              <a:defRPr sz="1200"/>
-            </a:lvl1pPr>
-          </a:lstStyle>
-          <a:p>
-            <a:endParaRPr lang="en-US"/>
-          </a:p>
-        </p:txBody>
-      </p:sp>
-      <p:sp>
-        <p:nvSpPr>
-          <p:cNvPr id="3" name="Date Placeholder 2"/>
-          <p:cNvSpPr>
-            <a:spLocks noGrp="1"/>
-          </p:cNvSpPr>
-          <p:nvPr>
-            <p:ph type="dt" idx="1"/>
-          </p:nvPr>
-        </p:nvSpPr>
-        <p:spPr>
-          <a:xfrm>
-            <a:off x="3884613" y="0"/>
-            <a:ext cx="2971800" cy="458788"/>
-          </a:xfrm>
-          <a:prstGeom prst="rect">
-            <a:avLst/>
-          </a:prstGeom>
-        </p:spPr>
-        <p:txBody>
-          <a:bodyPr vert="horz" lIns="91440" tIns="45720" rIns="91440" bIns="45720" rtlCol="0"/>
-          <a:lstStyle>
-            <a:lvl1pPr algn="r">
-              <a:defRPr sz="1200"/>
-            </a:lvl1pPr>
-          </a:lstStyle>
-          <a:p>
-            <a:fld id="{5282F153-3F37-0F45-9E97-73ACFA13230C}" type="datetimeFigureOut">
-              <a:rPr lang="en-US"/>
-              <a:t>7/23/19</a:t>
-            </a:fld>
-            <a:endParaRPr lang="en-US"/>
-          </a:p>
-        </p:txBody>
-      </p:sp>
-      <p:sp>
-        <p:nvSpPr>
-          <p:cNvPr id="4" name="Slide Image Placeholder 3"/>
-          <p:cNvSpPr>
-            <a:spLocks noGrp="1" noRot="1" noChangeAspect="1"/>
-          </p:cNvSpPr>
-          <p:nvPr>
-            <p:ph type="sldImg" idx="2"/>
-          </p:nvPr>
-        </p:nvSpPr>
-        <p:spPr>
-          <a:xfrm>
-            <a:off x="685800" y="1143000"/>
-            <a:ext cx="5486400" cy="3086100"/>
-          </a:xfrm>
-          <a:prstGeom prst="rect">
-            <a:avLst/>
-          </a:prstGeom>
-          <a:noFill/>
-          <a:ln w="12700">
-            <a:solidFill>
-              <a:prstClr val="black"/>
-            </a:solidFill>
-          </a:ln>
-        </p:spPr>
-        <p:txBody>
-          <a:bodyPr vert="horz" lIns="91440" tIns="45720" rIns="91440" bIns="45720" rtlCol="0" anchor="ctr"/>
-          <a:lstStyle/>
-          <a:p>
-            <a:endParaRPr lang="en-US"/>
-          </a:p>
-        </p:txBody>
-      </p:sp>
-      <p:sp>
-        <p:nvSpPr>
-          <p:cNvPr id="5" name="Notes Placeholder 4"/>
-          <p:cNvSpPr>
-            <a:spLocks noGrp="1"/>
-          </p:cNvSpPr>
-          <p:nvPr>
-            <p:ph type="body" sz="quarter" idx="3"/>
-          </p:nvPr>
-        </p:nvSpPr>
-        <p:spPr>
-          <a:xfrm>
-            <a:off x="685800" y="4400550"/>
-            <a:ext cx="5486400" cy="3600450"/>
-          </a:xfrm>
-          <a:prstGeom prst="rect">
-            <a:avLst/>
-          </a:prstGeom>
-        </p:spPr>
-        <p:txBody>
-          <a:bodyPr vert="horz" lIns="91440" tIns="45720" rIns="91440" bIns="45720" rtlCol="0"/>
-          <a:lstStyle/>
-          <a:p>
-            <a:pPr lvl="0"/>
-            <a:r>
-              <a:rPr lang="en-US"/>
-              <a:t>Click to edit Master text styles</a:t>
-            </a:r>
-          </a:p>
-          <a:p>
-            <a:pPr lvl="1"/>
-            <a:r>
-              <a:rPr lang="en-US"/>
-              <a:t>Second level</a:t>
-            </a:r>
-          </a:p>
-          <a:p>
-            <a:pPr lvl="2"/>
-            <a:r>
-              <a:rPr lang="en-US"/>
-              <a:t>Third level</a:t>
-            </a:r>
-          </a:p>
-          <a:p>
-            <a:pPr lvl="3"/>
-            <a:r>
-              <a:rPr lang="en-US"/>
-              <a:t>Fourth level</a:t>
-            </a:r>
-          </a:p>
-          <a:p>
-            <a:pPr lvl="4"/>
-            <a:r>
-              <a:rPr lang="en-US"/>
-              <a:t>Fifth level</a:t>
-            </a:r>
-          </a:p>
-        </p:txBody>
-      </p:sp>
-      <p:sp>
-        <p:nvSpPr>
-          <p:cNvPr id="6" name="Footer Placeholder 5"/>
-          <p:cNvSpPr>
-            <a:spLocks noGrp="1"/>
-          </p:cNvSpPr>
-          <p:nvPr>
-            <p:ph type="ftr" sz="quarter" idx="4"/>
-          </p:nvPr>
-        </p:nvSpPr>
-        <p:spPr>
-          <a:xfrm>
-            <a:off x="0" y="8685213"/>
-            <a:ext cx="2971800" cy="458787"/>
-          </a:xfrm>
-          <a:prstGeom prst="rect">
-            <a:avLst/>
-          </a:prstGeom>
-        </p:spPr>
-        <p:txBody>
-          <a:bodyPr vert="horz" lIns="91440" tIns="45720" rIns="91440" bIns="45720" rtlCol="0" anchor="b"/>
-          <a:lstStyle>
-            <a:lvl1pPr algn="l">
-              <a:defRPr sz="1200"/>
-            </a:lvl1pPr>
-          </a:lstStyle>
-          <a:p>
-            <a:endParaRPr lang="en-US"/>
-          </a:p>
-        </p:txBody>
-      </p:sp>
-      <p:sp>
-        <p:nvSpPr>
-          <p:cNvPr id="7" name="Slide Number Placeholder 6"/>
-          <p:cNvSpPr>
-            <a:spLocks noGrp="1"/>
-          </p:cNvSpPr>
-          <p:nvPr>
-            <p:ph type="sldNum" sz="quarter" idx="5"/>
-          </p:nvPr>
-        </p:nvSpPr>
-        <p:spPr>
-          <a:xfrm>
-            <a:off x="3884613" y="8685213"/>
-            <a:ext cx="2971800" cy="458787"/>
-          </a:xfrm>
-          <a:prstGeom prst="rect">
-            <a:avLst/>
-          </a:prstGeom>
-        </p:spPr>
-        <p:txBody>
-          <a:bodyPr vert="horz" lIns="91440" tIns="45720" rIns="91440" bIns="45720" rtlCol="0" anchor="b"/>
-          <a:lstStyle>
-            <a:lvl1pPr algn="r">
-              <a:defRPr sz="1200"/>
-            </a:lvl1pPr>
-          </a:lstStyle>
-          <a:p>
-            <a:fld id="{CE5E9CC1-C706-0F49-92D6-E571CC5EEA8F}" type="slidenum">
-              <a:rPr lang="en-US"/>
-              <a:t>‹#›</a:t>
-            </a:fld>
-            <a:endParaRPr lang="en-US"/>
-          </a:p>
-        </p:txBody>
-      </p:sp>
     </p:spTree>
     <p:extLst>
       <p:ext uri="{BB962C8B-B14F-4D97-AF65-F5344CB8AC3E}">
-        <p14:creationId xmlns:p14="http://schemas.microsoft.com/office/powerpoint/2010/main" val="1024086991"/>
+        <p14:creationId xmlns:p14="http://schemas.microsoft.com/office/powerpoint/2010/main" val="1116697846"/>
       </p:ext>
     </p:extLst>
   </p:cSld>
@@ -511,10 +321,6 @@
           <a:bodyPr/>
           <a:lstStyle/>
           <a:p>
-            <a:r>
-              <a:rPr lang="en-US" dirty="0"/>
-              <a:t/>
-            </a:r>
             <a:endParaRPr lang="en-US" dirty="0"/>
           </a:p>
         </p:txBody>
@@ -599,10 +405,6 @@
           <a:bodyPr/>
           <a:lstStyle/>
           <a:p>
-            <a:r>
-              <a:rPr lang="en-US" dirty="0"/>
-              <a:t/>
-            </a:r>
             <a:endParaRPr lang="en-US" dirty="0"/>
           </a:p>
         </p:txBody>
@@ -687,10 +489,6 @@
           <a:bodyPr/>
           <a:lstStyle/>
           <a:p>
-            <a:r>
-              <a:rPr lang="en-US" dirty="0"/>
-              <a:t/>
-            </a:r>
             <a:endParaRPr lang="en-US" dirty="0"/>
           </a:p>
         </p:txBody>
@@ -775,10 +573,6 @@
           <a:bodyPr/>
           <a:lstStyle/>
           <a:p>
-            <a:r>
-              <a:rPr lang="en-US" dirty="0"/>
-              <a:t/>
-            </a:r>
             <a:endParaRPr lang="en-US" dirty="0"/>
           </a:p>
         </p:txBody>
@@ -863,10 +657,6 @@
           <a:bodyPr/>
           <a:lstStyle/>
           <a:p>
-            <a:r>
-              <a:rPr lang="en-US" dirty="0"/>
-              <a:t/>
-            </a:r>
             <a:endParaRPr lang="en-US" dirty="0"/>
           </a:p>
         </p:txBody>
@@ -951,10 +741,6 @@
           <a:bodyPr/>
           <a:lstStyle/>
           <a:p>
-            <a:r>
-              <a:rPr lang="en-US" dirty="0"/>
-              <a:t/>
-            </a:r>
             <a:endParaRPr lang="en-US" dirty="0"/>
           </a:p>
         </p:txBody>
@@ -1039,10 +825,6 @@
           <a:bodyPr/>
           <a:lstStyle/>
           <a:p>
-            <a:r>
-              <a:rPr lang="en-US" dirty="0"/>
-              <a:t/>
-            </a:r>
             <a:endParaRPr lang="en-US" dirty="0"/>
           </a:p>
         </p:txBody>
@@ -1127,10 +909,6 @@
           <a:bodyPr/>
           <a:lstStyle/>
           <a:p>
-            <a:r>
-              <a:rPr lang="en-US" dirty="0"/>
-              <a:t/>
-            </a:r>
             <a:endParaRPr lang="en-US" dirty="0"/>
           </a:p>
         </p:txBody>
@@ -1215,10 +993,6 @@
           <a:bodyPr/>
           <a:lstStyle/>
           <a:p>
-            <a:r>
-              <a:rPr lang="en-US" dirty="0"/>
-              <a:t/>
-            </a:r>
             <a:endParaRPr lang="en-US" dirty="0"/>
           </a:p>
         </p:txBody>
@@ -1303,10 +1077,6 @@
           <a:bodyPr/>
           <a:lstStyle/>
           <a:p>
-            <a:r>
-              <a:rPr lang="en-US" dirty="0"/>
-              <a:t/>
-            </a:r>
             <a:endParaRPr lang="en-US" dirty="0"/>
           </a:p>
         </p:txBody>
@@ -1391,10 +1161,6 @@
           <a:bodyPr/>
           <a:lstStyle/>
           <a:p>
-            <a:r>
-              <a:rPr lang="en-US" dirty="0"/>
-              <a:t/>
-            </a:r>
             <a:endParaRPr lang="en-US" dirty="0"/>
           </a:p>
         </p:txBody>
@@ -1479,10 +1245,6 @@
           <a:bodyPr/>
           <a:lstStyle/>
           <a:p>
-            <a:r>
-              <a:rPr lang="en-US" dirty="0"/>
-              <a:t/>
-            </a:r>
             <a:endParaRPr lang="en-US" dirty="0"/>
           </a:p>
         </p:txBody>
@@ -1556,6 +1318,11 @@
 <file path=ppt/slideMasters/slideMaster1.xml><?xml version="1.0" encoding="utf-8"?>
 <p:sldMaster xmlns:a="http://schemas.openxmlformats.org/drawingml/2006/main" xmlns:r="http://schemas.openxmlformats.org/officeDocument/2006/relationships" xmlns:p="http://schemas.openxmlformats.org/presentationml/2006/main">
   <p:cSld>
+    <p:bg>
+      <p:bgRef idx="1001">
+        <a:schemeClr val="bg1"/>
+      </p:bgRef>
+    </p:bg>
     <p:spTree>
       <p:nvGrpSpPr>
         <p:cNvPr id="1" name=""/>
@@ -1838,6 +1605,7 @@
         <a:solidFill>
           <a:srgbClr val="080D20"/>
         </a:solidFill>
+        <a:effectLst/>
       </p:bgPr>
     </p:bg>
     <p:spTree>
@@ -1907,6 +1675,13 @@
             <a:prstDash val="solid"/>
           </a:ln>
         </p:spPr>
+        <p:txBody>
+          <a:bodyPr/>
+          <a:lstStyle/>
+          <a:p>
+            <a:endParaRPr lang="en-IN" dirty="0"/>
+          </a:p>
+        </p:txBody>
       </p:sp>
       <p:sp>
         <p:nvSpPr>
@@ -1956,7 +1731,7 @@
           <a:bodyPr wrap="square" lIns="0" tIns="0" rIns="0" bIns="0" rtlCol="0" anchor="ctr"/>
           <a:lstStyle/>
           <a:p>
-            <a:pPr algn="ctr" indent="0" marL="0">
+            <a:pPr marL="0" indent="0" algn="ctr">
               <a:buNone/>
             </a:pPr>
             <a:r>
@@ -1995,7 +1770,7 @@
           <a:bodyPr wrap="square" lIns="0" tIns="0" rIns="0" bIns="0" rtlCol="0" anchor="ctr"/>
           <a:lstStyle/>
           <a:p>
-            <a:pPr indent="0" marL="0">
+            <a:pPr marL="0" indent="0">
               <a:buNone/>
             </a:pPr>
             <a:r>
@@ -2009,9 +1784,6 @@
               </a:rPr>
               <a:t>Fraud</a:t>
             </a:r>
-            <a:pPr indent="0" marL="0">
-              <a:buNone/>
-            </a:pPr>
             <a:r>
               <a:rPr lang="en-US" sz="3100" b="1" dirty="0">
                 <a:solidFill>
@@ -2077,11 +1849,11 @@
           <a:bodyPr wrap="square" lIns="0" tIns="0" rIns="0" bIns="0" rtlCol="0" anchor="ctr"/>
           <a:lstStyle/>
           <a:p>
-            <a:pPr algn="ctr" indent="0" marL="0">
-              <a:buNone/>
-            </a:pPr>
-            <a:r>
-              <a:rPr lang="en-US" sz="1150" b="1" spc="200" kern="0" dirty="0">
+            <a:pPr marL="0" indent="0" algn="ctr">
+              <a:buNone/>
+            </a:pPr>
+            <a:r>
+              <a:rPr lang="en-US" sz="1150" b="1" kern="0" spc="200" dirty="0">
                 <a:solidFill>
                   <a:srgbClr val="FB5779"/>
                 </a:solidFill>
@@ -2116,7 +1888,7 @@
           <a:bodyPr wrap="square" lIns="0" tIns="0" rIns="0" bIns="0" rtlCol="0" anchor="ctr"/>
           <a:lstStyle/>
           <a:p>
-            <a:pPr indent="0" marL="0">
+            <a:pPr marL="0" indent="0">
               <a:buNone/>
             </a:pPr>
             <a:r>
@@ -2155,7 +1927,7 @@
           <a:bodyPr wrap="square" lIns="0" tIns="0" rIns="0" bIns="0" rtlCol="0" anchor="ctr"/>
           <a:lstStyle/>
           <a:p>
-            <a:pPr indent="0" marL="0">
+            <a:pPr marL="0" indent="0">
               <a:buNone/>
             </a:pPr>
             <a:r>
@@ -2169,9 +1941,6 @@
               </a:rPr>
               <a:t>before </a:t>
             </a:r>
-            <a:pPr indent="0" marL="0">
-              <a:buNone/>
-            </a:pPr>
             <a:r>
               <a:rPr lang="en-US" sz="4700" b="1" dirty="0">
                 <a:solidFill>
@@ -2208,7 +1977,7 @@
           <a:bodyPr wrap="square" lIns="0" tIns="0" rIns="0" bIns="0" rtlCol="0" anchor="ctr"/>
           <a:lstStyle/>
           <a:p>
-            <a:pPr indent="0" marL="0">
+            <a:pPr marL="0" indent="0">
               <a:lnSpc>
                 <a:spcPct val="112000"/>
               </a:lnSpc>
@@ -2250,7 +2019,7 @@
           <a:bodyPr wrap="square" lIns="0" tIns="0" rIns="0" bIns="0" rtlCol="0" anchor="ctr"/>
           <a:lstStyle/>
           <a:p>
-            <a:pPr indent="0" marL="0">
+            <a:pPr marL="0" indent="0">
               <a:buNone/>
             </a:pPr>
             <a:r>
@@ -2289,7 +2058,7 @@
           <a:bodyPr wrap="square" lIns="0" tIns="0" rIns="0" bIns="0" rtlCol="0" anchor="ctr"/>
           <a:lstStyle/>
           <a:p>
-            <a:pPr indent="0" marL="0">
+            <a:pPr marL="0" indent="0">
               <a:buNone/>
             </a:pPr>
             <a:r>
@@ -2328,7 +2097,7 @@
           <a:bodyPr wrap="square" lIns="0" tIns="0" rIns="0" bIns="0" rtlCol="0" anchor="ctr"/>
           <a:lstStyle/>
           <a:p>
-            <a:pPr indent="0" marL="0">
+            <a:pPr marL="0" indent="0">
               <a:buNone/>
             </a:pPr>
             <a:r>
@@ -2367,7 +2136,7 @@
           <a:bodyPr wrap="square" lIns="0" tIns="0" rIns="0" bIns="0" rtlCol="0" anchor="ctr"/>
           <a:lstStyle/>
           <a:p>
-            <a:pPr indent="0" marL="0">
+            <a:pPr marL="0" indent="0">
               <a:buNone/>
             </a:pPr>
             <a:r>
@@ -2406,7 +2175,7 @@
           <a:bodyPr wrap="square" lIns="0" tIns="0" rIns="0" bIns="0" rtlCol="0" anchor="ctr"/>
           <a:lstStyle/>
           <a:p>
-            <a:pPr indent="0" marL="0">
+            <a:pPr marL="0" indent="0">
               <a:buNone/>
             </a:pPr>
             <a:r>
@@ -2445,7 +2214,7 @@
           <a:bodyPr wrap="square" lIns="0" tIns="0" rIns="0" bIns="0" rtlCol="0" anchor="ctr"/>
           <a:lstStyle/>
           <a:p>
-            <a:pPr indent="0" marL="0">
+            <a:pPr marL="0" indent="0">
               <a:buNone/>
             </a:pPr>
             <a:r>
@@ -2484,7 +2253,7 @@
           <a:bodyPr wrap="square" lIns="0" tIns="0" rIns="0" bIns="0" rtlCol="0" anchor="ctr"/>
           <a:lstStyle/>
           <a:p>
-            <a:pPr algn="r" indent="0" marL="0">
+            <a:pPr marL="0" indent="0" algn="r">
               <a:buNone/>
             </a:pPr>
             <a:r>
@@ -2518,6 +2287,7 @@
         <a:solidFill>
           <a:srgbClr val="0C1330"/>
         </a:solidFill>
+        <a:effectLst/>
       </p:bgPr>
     </p:bg>
     <p:spTree>
@@ -2555,11 +2325,11 @@
           <a:bodyPr wrap="square" lIns="0" tIns="0" rIns="0" bIns="0" rtlCol="0" anchor="ctr"/>
           <a:lstStyle/>
           <a:p>
-            <a:pPr indent="0" marL="0">
-              <a:buNone/>
-            </a:pPr>
-            <a:r>
-              <a:rPr lang="en-US" sz="1100" b="1" spc="300" kern="0" dirty="0">
+            <a:pPr marL="0" indent="0">
+              <a:buNone/>
+            </a:pPr>
+            <a:r>
+              <a:rPr lang="en-US" sz="1100" b="1" kern="0" spc="300" dirty="0">
                 <a:solidFill>
                   <a:srgbClr val="22D3EE"/>
                 </a:solidFill>
@@ -2594,7 +2364,7 @@
           <a:bodyPr wrap="square" lIns="0" tIns="0" rIns="0" bIns="0" rtlCol="0" anchor="ctr"/>
           <a:lstStyle/>
           <a:p>
-            <a:pPr indent="0" marL="0">
+            <a:pPr marL="0" indent="0">
               <a:buNone/>
             </a:pPr>
             <a:r>
@@ -2633,7 +2403,7 @@
           <a:bodyPr wrap="square" lIns="0" tIns="0" rIns="0" bIns="0" rtlCol="0" anchor="ctr"/>
           <a:lstStyle/>
           <a:p>
-            <a:pPr indent="0" marL="0">
+            <a:pPr marL="0" indent="0">
               <a:buNone/>
             </a:pPr>
             <a:r>
@@ -2677,7 +2447,7 @@
             <a:prstDash val="solid"/>
           </a:ln>
           <a:effectLst>
-            <a:outerShdw sx="100000" sy="100000" kx="0" ky="0" algn="bl" rotWithShape="0" blurRad="114300" dist="50800" dir="5400000">
+            <a:outerShdw blurRad="114300" dist="50800" dir="5400000" algn="bl" rotWithShape="0">
               <a:srgbClr val="000000">
                 <a:alpha val="28000"/>
               </a:srgbClr>
@@ -2706,11 +2476,11 @@
           <a:bodyPr wrap="square" lIns="0" tIns="0" rIns="0" bIns="0" rtlCol="0" anchor="ctr"/>
           <a:lstStyle/>
           <a:p>
-            <a:pPr indent="0" marL="0">
-              <a:buNone/>
-            </a:pPr>
-            <a:r>
-              <a:rPr lang="en-US" sz="1250" b="1" spc="200" kern="0" dirty="0">
+            <a:pPr marL="0" indent="0">
+              <a:buNone/>
+            </a:pPr>
+            <a:r>
+              <a:rPr lang="en-US" sz="1250" b="1" kern="0" spc="200" dirty="0">
                 <a:solidFill>
                   <a:srgbClr val="34D399"/>
                 </a:solidFill>
@@ -2745,7 +2515,7 @@
           <a:bodyPr wrap="square" lIns="0" tIns="0" rIns="0" bIns="0" rtlCol="0" anchor="ctr"/>
           <a:lstStyle/>
           <a:p>
-            <a:pPr indent="0" marL="0">
+            <a:pPr marL="0" indent="0">
               <a:buNone/>
             </a:pPr>
             <a:r>
@@ -2784,7 +2554,7 @@
           <a:bodyPr wrap="square" lIns="0" tIns="0" rIns="0" bIns="0" rtlCol="0" anchor="t"/>
           <a:lstStyle/>
           <a:p>
-            <a:pPr indent="0" marL="0">
+            <a:pPr marL="0" indent="0">
               <a:lnSpc>
                 <a:spcPct val="105000"/>
               </a:lnSpc>
@@ -2801,13 +2571,99 @@
               </a:rPr>
               <a:t>Digital Arrest Scam Detection  </a:t>
             </a:r>
-            <a:pPr indent="0" marL="0">
+            <a:r>
+              <a:rPr lang="en-US" sz="1250" dirty="0">
+                <a:solidFill>
+                  <a:srgbClr val="9BAAD4"/>
+                </a:solidFill>
+                <a:latin typeface="Calibri" pitchFamily="34" charset="0"/>
+                <a:ea typeface="Calibri" pitchFamily="34" charset="-122"/>
+                <a:cs typeface="Calibri" pitchFamily="34" charset="-120"/>
+              </a:rPr>
+              <a:t>— stage + red-flag classifier, lead-time alerting</a:t>
+            </a:r>
+            <a:endParaRPr lang="en-US" sz="1250" dirty="0"/>
+          </a:p>
+        </p:txBody>
+      </p:sp>
+      <p:sp>
+        <p:nvSpPr>
+          <p:cNvPr id="9" name="Text 7"/>
+          <p:cNvSpPr/>
+          <p:nvPr/>
+        </p:nvSpPr>
+        <p:spPr>
+          <a:xfrm>
+            <a:off x="822960" y="3803904"/>
+            <a:ext cx="365760" cy="365760"/>
+          </a:xfrm>
+          <a:prstGeom prst="rect">
+            <a:avLst/>
+          </a:prstGeom>
+          <a:noFill/>
+          <a:ln/>
+        </p:spPr>
+        <p:txBody>
+          <a:bodyPr wrap="square" lIns="0" tIns="0" rIns="0" bIns="0" rtlCol="0" anchor="ctr"/>
+          <a:lstStyle/>
+          <a:p>
+            <a:pPr marL="0" indent="0">
+              <a:buNone/>
+            </a:pPr>
+            <a:r>
+              <a:rPr lang="en-US" sz="1500" b="1" dirty="0">
+                <a:solidFill>
+                  <a:srgbClr val="34D399"/>
+                </a:solidFill>
+                <a:latin typeface="Calibri" pitchFamily="34" charset="0"/>
+                <a:ea typeface="Calibri" pitchFamily="34" charset="-122"/>
+                <a:cs typeface="Calibri" pitchFamily="34" charset="-120"/>
+              </a:rPr>
+              <a:t>✓</a:t>
+            </a:r>
+            <a:endParaRPr lang="en-US" sz="1500" dirty="0"/>
+          </a:p>
+        </p:txBody>
+      </p:sp>
+      <p:sp>
+        <p:nvSpPr>
+          <p:cNvPr id="10" name="Text 8"/>
+          <p:cNvSpPr/>
+          <p:nvPr/>
+        </p:nvSpPr>
+        <p:spPr>
+          <a:xfrm>
+            <a:off x="1207008" y="3776472"/>
+            <a:ext cx="4617720" cy="749808"/>
+          </a:xfrm>
+          <a:prstGeom prst="rect">
+            <a:avLst/>
+          </a:prstGeom>
+          <a:noFill/>
+          <a:ln/>
+        </p:spPr>
+        <p:txBody>
+          <a:bodyPr wrap="square" lIns="0" tIns="0" rIns="0" bIns="0" rtlCol="0" anchor="t"/>
+          <a:lstStyle/>
+          <a:p>
+            <a:pPr marL="0" indent="0">
               <a:lnSpc>
                 <a:spcPct val="105000"/>
               </a:lnSpc>
               <a:buNone/>
             </a:pPr>
             <a:r>
+              <a:rPr lang="en-US" sz="1250" b="1" dirty="0">
+                <a:solidFill>
+                  <a:srgbClr val="F0F4FF"/>
+                </a:solidFill>
+                <a:latin typeface="Calibri" pitchFamily="34" charset="0"/>
+                <a:ea typeface="Calibri" pitchFamily="34" charset="-122"/>
+                <a:cs typeface="Calibri" pitchFamily="34" charset="-120"/>
+              </a:rPr>
+              <a:t>Citizen Fraud Shield  </a:t>
+            </a:r>
+            <a:r>
               <a:rPr lang="en-US" sz="1250" dirty="0">
                 <a:solidFill>
                   <a:srgbClr val="9BAAD4"/>
@@ -2816,7 +2672,7 @@
                 <a:ea typeface="Calibri" pitchFamily="34" charset="-122"/>
                 <a:cs typeface="Calibri" pitchFamily="34" charset="-120"/>
               </a:rPr>
-              <a:t>— stage + red-flag classifier, lead-time alerting</a:t>
+              <a:t>— mobile app, instant verdicts, NCRB/1930 reporting</a:t>
             </a:r>
             <a:endParaRPr lang="en-US" sz="1250" dirty="0"/>
           </a:p>
@@ -2824,13 +2680,13 @@
       </p:sp>
       <p:sp>
         <p:nvSpPr>
-          <p:cNvPr id="9" name="Text 7"/>
-          <p:cNvSpPr/>
-          <p:nvPr/>
-        </p:nvSpPr>
-        <p:spPr>
-          <a:xfrm>
-            <a:off x="822960" y="3803904"/>
+          <p:cNvPr id="11" name="Text 9"/>
+          <p:cNvSpPr/>
+          <p:nvPr/>
+        </p:nvSpPr>
+        <p:spPr>
+          <a:xfrm>
+            <a:off x="822960" y="4608576"/>
             <a:ext cx="365760" cy="365760"/>
           </a:xfrm>
           <a:prstGeom prst="rect">
@@ -2843,7 +2699,7 @@
           <a:bodyPr wrap="square" lIns="0" tIns="0" rIns="0" bIns="0" rtlCol="0" anchor="ctr"/>
           <a:lstStyle/>
           <a:p>
-            <a:pPr indent="0" marL="0">
+            <a:pPr marL="0" indent="0">
               <a:buNone/>
             </a:pPr>
             <a:r>
@@ -2863,13 +2719,13 @@
       </p:sp>
       <p:sp>
         <p:nvSpPr>
-          <p:cNvPr id="10" name="Text 8"/>
-          <p:cNvSpPr/>
-          <p:nvPr/>
-        </p:nvSpPr>
-        <p:spPr>
-          <a:xfrm>
-            <a:off x="1207008" y="3776472"/>
+          <p:cNvPr id="12" name="Text 10"/>
+          <p:cNvSpPr/>
+          <p:nvPr/>
+        </p:nvSpPr>
+        <p:spPr>
+          <a:xfrm>
+            <a:off x="1207008" y="4581144"/>
             <a:ext cx="4617720" cy="749808"/>
           </a:xfrm>
           <a:prstGeom prst="rect">
@@ -2882,7 +2738,7 @@
           <a:bodyPr wrap="square" lIns="0" tIns="0" rIns="0" bIns="0" rtlCol="0" anchor="t"/>
           <a:lstStyle/>
           <a:p>
-            <a:pPr indent="0" marL="0">
+            <a:pPr marL="0" indent="0">
               <a:lnSpc>
                 <a:spcPct val="105000"/>
               </a:lnSpc>
@@ -2897,96 +2753,90 @@
                 <a:ea typeface="Calibri" pitchFamily="34" charset="-122"/>
                 <a:cs typeface="Calibri" pitchFamily="34" charset="-120"/>
               </a:rPr>
-              <a:t>Citizen Fraud Shield  </a:t>
-            </a:r>
-            <a:pPr indent="0" marL="0">
+              <a:t>Voice / AI-voice detection  </a:t>
+            </a:r>
+            <a:r>
+              <a:rPr lang="en-US" sz="1250" dirty="0">
+                <a:solidFill>
+                  <a:srgbClr val="9BAAD4"/>
+                </a:solidFill>
+                <a:latin typeface="Calibri" pitchFamily="34" charset="0"/>
+                <a:ea typeface="Calibri" pitchFamily="34" charset="-122"/>
+                <a:cs typeface="Calibri" pitchFamily="34" charset="-120"/>
+              </a:rPr>
+              <a:t>— wav2vec2 deepfake detector, AUC 1.0</a:t>
+            </a:r>
+            <a:endParaRPr lang="en-US" sz="1250" dirty="0"/>
+          </a:p>
+        </p:txBody>
+      </p:sp>
+      <p:sp>
+        <p:nvSpPr>
+          <p:cNvPr id="13" name="Text 11"/>
+          <p:cNvSpPr/>
+          <p:nvPr/>
+        </p:nvSpPr>
+        <p:spPr>
+          <a:xfrm>
+            <a:off x="822960" y="5413248"/>
+            <a:ext cx="365760" cy="365760"/>
+          </a:xfrm>
+          <a:prstGeom prst="rect">
+            <a:avLst/>
+          </a:prstGeom>
+          <a:noFill/>
+          <a:ln/>
+        </p:spPr>
+        <p:txBody>
+          <a:bodyPr wrap="square" lIns="0" tIns="0" rIns="0" bIns="0" rtlCol="0" anchor="ctr"/>
+          <a:lstStyle/>
+          <a:p>
+            <a:pPr marL="0" indent="0">
+              <a:buNone/>
+            </a:pPr>
+            <a:r>
+              <a:rPr lang="en-US" sz="1500" b="1" dirty="0">
+                <a:solidFill>
+                  <a:srgbClr val="34D399"/>
+                </a:solidFill>
+                <a:latin typeface="Calibri" pitchFamily="34" charset="0"/>
+                <a:ea typeface="Calibri" pitchFamily="34" charset="-122"/>
+                <a:cs typeface="Calibri" pitchFamily="34" charset="-120"/>
+              </a:rPr>
+              <a:t>✓</a:t>
+            </a:r>
+            <a:endParaRPr lang="en-US" sz="1500" dirty="0"/>
+          </a:p>
+        </p:txBody>
+      </p:sp>
+      <p:sp>
+        <p:nvSpPr>
+          <p:cNvPr id="14" name="Text 12"/>
+          <p:cNvSpPr/>
+          <p:nvPr/>
+        </p:nvSpPr>
+        <p:spPr>
+          <a:xfrm>
+            <a:off x="1207008" y="5385816"/>
+            <a:ext cx="4617720" cy="749808"/>
+          </a:xfrm>
+          <a:prstGeom prst="rect">
+            <a:avLst/>
+          </a:prstGeom>
+          <a:noFill/>
+          <a:ln/>
+        </p:spPr>
+        <p:txBody>
+          <a:bodyPr wrap="square" lIns="0" tIns="0" rIns="0" bIns="0" rtlCol="0" anchor="t"/>
+          <a:lstStyle/>
+          <a:p>
+            <a:pPr marL="0" indent="0">
               <a:lnSpc>
                 <a:spcPct val="105000"/>
               </a:lnSpc>
               <a:buNone/>
             </a:pPr>
             <a:r>
-              <a:rPr lang="en-US" sz="1250" dirty="0">
-                <a:solidFill>
-                  <a:srgbClr val="9BAAD4"/>
-                </a:solidFill>
-                <a:latin typeface="Calibri" pitchFamily="34" charset="0"/>
-                <a:ea typeface="Calibri" pitchFamily="34" charset="-122"/>
-                <a:cs typeface="Calibri" pitchFamily="34" charset="-120"/>
-              </a:rPr>
-              <a:t>— mobile app, instant verdicts, NCRB/1930 reporting</a:t>
-            </a:r>
-            <a:endParaRPr lang="en-US" sz="1250" dirty="0"/>
-          </a:p>
-        </p:txBody>
-      </p:sp>
-      <p:sp>
-        <p:nvSpPr>
-          <p:cNvPr id="11" name="Text 9"/>
-          <p:cNvSpPr/>
-          <p:nvPr/>
-        </p:nvSpPr>
-        <p:spPr>
-          <a:xfrm>
-            <a:off x="822960" y="4608576"/>
-            <a:ext cx="365760" cy="365760"/>
-          </a:xfrm>
-          <a:prstGeom prst="rect">
-            <a:avLst/>
-          </a:prstGeom>
-          <a:noFill/>
-          <a:ln/>
-        </p:spPr>
-        <p:txBody>
-          <a:bodyPr wrap="square" lIns="0" tIns="0" rIns="0" bIns="0" rtlCol="0" anchor="ctr"/>
-          <a:lstStyle/>
-          <a:p>
-            <a:pPr indent="0" marL="0">
-              <a:buNone/>
-            </a:pPr>
-            <a:r>
-              <a:rPr lang="en-US" sz="1500" b="1" dirty="0">
-                <a:solidFill>
-                  <a:srgbClr val="34D399"/>
-                </a:solidFill>
-                <a:latin typeface="Calibri" pitchFamily="34" charset="0"/>
-                <a:ea typeface="Calibri" pitchFamily="34" charset="-122"/>
-                <a:cs typeface="Calibri" pitchFamily="34" charset="-120"/>
-              </a:rPr>
-              <a:t>✓</a:t>
-            </a:r>
-            <a:endParaRPr lang="en-US" sz="1500" dirty="0"/>
-          </a:p>
-        </p:txBody>
-      </p:sp>
-      <p:sp>
-        <p:nvSpPr>
-          <p:cNvPr id="12" name="Text 10"/>
-          <p:cNvSpPr/>
-          <p:nvPr/>
-        </p:nvSpPr>
-        <p:spPr>
-          <a:xfrm>
-            <a:off x="1207008" y="4581144"/>
-            <a:ext cx="4617720" cy="749808"/>
-          </a:xfrm>
-          <a:prstGeom prst="rect">
-            <a:avLst/>
-          </a:prstGeom>
-          <a:noFill/>
-          <a:ln/>
-        </p:spPr>
-        <p:txBody>
-          <a:bodyPr wrap="square" lIns="0" tIns="0" rIns="0" bIns="0" rtlCol="0" anchor="t"/>
-          <a:lstStyle/>
-          <a:p>
-            <a:pPr indent="0" marL="0">
-              <a:lnSpc>
-                <a:spcPct val="105000"/>
-              </a:lnSpc>
-              <a:buNone/>
-            </a:pPr>
-            <a:r>
               <a:rPr lang="en-US" sz="1250" b="1" dirty="0">
                 <a:solidFill>
                   <a:srgbClr val="F0F4FF"/>
@@ -2995,112 +2845,8 @@
                 <a:ea typeface="Calibri" pitchFamily="34" charset="-122"/>
                 <a:cs typeface="Calibri" pitchFamily="34" charset="-120"/>
               </a:rPr>
-              <a:t>Voice / AI-voice detection  </a:t>
-            </a:r>
-            <a:pPr indent="0" marL="0">
-              <a:lnSpc>
-                <a:spcPct val="105000"/>
-              </a:lnSpc>
-              <a:buNone/>
-            </a:pPr>
-            <a:r>
-              <a:rPr lang="en-US" sz="1250" dirty="0">
-                <a:solidFill>
-                  <a:srgbClr val="9BAAD4"/>
-                </a:solidFill>
-                <a:latin typeface="Calibri" pitchFamily="34" charset="0"/>
-                <a:ea typeface="Calibri" pitchFamily="34" charset="-122"/>
-                <a:cs typeface="Calibri" pitchFamily="34" charset="-120"/>
-              </a:rPr>
-              <a:t>— wav2vec2 deepfake detector, AUC 1.0</a:t>
-            </a:r>
-            <a:endParaRPr lang="en-US" sz="1250" dirty="0"/>
-          </a:p>
-        </p:txBody>
-      </p:sp>
-      <p:sp>
-        <p:nvSpPr>
-          <p:cNvPr id="13" name="Text 11"/>
-          <p:cNvSpPr/>
-          <p:nvPr/>
-        </p:nvSpPr>
-        <p:spPr>
-          <a:xfrm>
-            <a:off x="822960" y="5413248"/>
-            <a:ext cx="365760" cy="365760"/>
-          </a:xfrm>
-          <a:prstGeom prst="rect">
-            <a:avLst/>
-          </a:prstGeom>
-          <a:noFill/>
-          <a:ln/>
-        </p:spPr>
-        <p:txBody>
-          <a:bodyPr wrap="square" lIns="0" tIns="0" rIns="0" bIns="0" rtlCol="0" anchor="ctr"/>
-          <a:lstStyle/>
-          <a:p>
-            <a:pPr indent="0" marL="0">
-              <a:buNone/>
-            </a:pPr>
-            <a:r>
-              <a:rPr lang="en-US" sz="1500" b="1" dirty="0">
-                <a:solidFill>
-                  <a:srgbClr val="34D399"/>
-                </a:solidFill>
-                <a:latin typeface="Calibri" pitchFamily="34" charset="0"/>
-                <a:ea typeface="Calibri" pitchFamily="34" charset="-122"/>
-                <a:cs typeface="Calibri" pitchFamily="34" charset="-120"/>
-              </a:rPr>
-              <a:t>✓</a:t>
-            </a:r>
-            <a:endParaRPr lang="en-US" sz="1500" dirty="0"/>
-          </a:p>
-        </p:txBody>
-      </p:sp>
-      <p:sp>
-        <p:nvSpPr>
-          <p:cNvPr id="14" name="Text 12"/>
-          <p:cNvSpPr/>
-          <p:nvPr/>
-        </p:nvSpPr>
-        <p:spPr>
-          <a:xfrm>
-            <a:off x="1207008" y="5385816"/>
-            <a:ext cx="4617720" cy="749808"/>
-          </a:xfrm>
-          <a:prstGeom prst="rect">
-            <a:avLst/>
-          </a:prstGeom>
-          <a:noFill/>
-          <a:ln/>
-        </p:spPr>
-        <p:txBody>
-          <a:bodyPr wrap="square" lIns="0" tIns="0" rIns="0" bIns="0" rtlCol="0" anchor="t"/>
-          <a:lstStyle/>
-          <a:p>
-            <a:pPr indent="0" marL="0">
-              <a:lnSpc>
-                <a:spcPct val="105000"/>
-              </a:lnSpc>
-              <a:buNone/>
-            </a:pPr>
-            <a:r>
-              <a:rPr lang="en-US" sz="1250" b="1" dirty="0">
-                <a:solidFill>
-                  <a:srgbClr val="F0F4FF"/>
-                </a:solidFill>
-                <a:latin typeface="Calibri" pitchFamily="34" charset="0"/>
-                <a:ea typeface="Calibri" pitchFamily="34" charset="-122"/>
-                <a:cs typeface="Calibri" pitchFamily="34" charset="-120"/>
-              </a:rPr>
               <a:t>Multi-source fusion  </a:t>
             </a:r>
-            <a:pPr indent="0" marL="0">
-              <a:lnSpc>
-                <a:spcPct val="105000"/>
-              </a:lnSpc>
-              <a:buNone/>
-            </a:pPr>
             <a:r>
               <a:rPr lang="en-US" sz="1250" dirty="0">
                 <a:solidFill>
@@ -3142,7 +2888,7 @@
             <a:prstDash val="solid"/>
           </a:ln>
           <a:effectLst>
-            <a:outerShdw sx="100000" sy="100000" kx="0" ky="0" algn="bl" rotWithShape="0" blurRad="114300" dist="50800" dir="5400000">
+            <a:outerShdw blurRad="114300" dist="50800" dir="5400000" algn="bl" rotWithShape="0">
               <a:srgbClr val="000000">
                 <a:alpha val="28000"/>
               </a:srgbClr>
@@ -3171,11 +2917,11 @@
           <a:bodyPr wrap="square" lIns="0" tIns="0" rIns="0" bIns="0" rtlCol="0" anchor="ctr"/>
           <a:lstStyle/>
           <a:p>
-            <a:pPr indent="0" marL="0">
-              <a:buNone/>
-            </a:pPr>
-            <a:r>
-              <a:rPr lang="en-US" sz="1250" b="1" spc="200" kern="0" dirty="0">
+            <a:pPr marL="0" indent="0">
+              <a:buNone/>
+            </a:pPr>
+            <a:r>
+              <a:rPr lang="en-US" sz="1250" b="1" kern="0" spc="200" dirty="0">
                 <a:solidFill>
                   <a:srgbClr val="6B7BA8"/>
                 </a:solidFill>
@@ -3210,7 +2956,7 @@
           <a:bodyPr wrap="square" lIns="0" tIns="0" rIns="0" bIns="0" rtlCol="0" anchor="ctr"/>
           <a:lstStyle/>
           <a:p>
-            <a:pPr indent="0" marL="0">
+            <a:pPr marL="0" indent="0">
               <a:buNone/>
             </a:pPr>
             <a:r>
@@ -3249,7 +2995,7 @@
           <a:bodyPr wrap="square" lIns="0" tIns="0" rIns="0" bIns="0" rtlCol="0" anchor="t"/>
           <a:lstStyle/>
           <a:p>
-            <a:pPr indent="0" marL="0">
+            <a:pPr marL="0" indent="0">
               <a:lnSpc>
                 <a:spcPct val="105000"/>
               </a:lnSpc>
@@ -3266,13 +3012,99 @@
               </a:rPr>
               <a:t>Counterfeit currency detection  </a:t>
             </a:r>
-            <a:pPr indent="0" marL="0">
+            <a:r>
+              <a:rPr lang="en-US" sz="1250" dirty="0">
+                <a:solidFill>
+                  <a:srgbClr val="9BAAD4"/>
+                </a:solidFill>
+                <a:latin typeface="Calibri" pitchFamily="34" charset="0"/>
+                <a:ea typeface="Calibri" pitchFamily="34" charset="-122"/>
+                <a:cs typeface="Calibri" pitchFamily="34" charset="-120"/>
+              </a:rPr>
+              <a:t>— computer-vision note verification</a:t>
+            </a:r>
+            <a:endParaRPr lang="en-US" sz="1250" dirty="0"/>
+          </a:p>
+        </p:txBody>
+      </p:sp>
+      <p:sp>
+        <p:nvSpPr>
+          <p:cNvPr id="19" name="Text 17"/>
+          <p:cNvSpPr/>
+          <p:nvPr/>
+        </p:nvSpPr>
+        <p:spPr>
+          <a:xfrm>
+            <a:off x="6446520" y="3803904"/>
+            <a:ext cx="365760" cy="365760"/>
+          </a:xfrm>
+          <a:prstGeom prst="rect">
+            <a:avLst/>
+          </a:prstGeom>
+          <a:noFill/>
+          <a:ln/>
+        </p:spPr>
+        <p:txBody>
+          <a:bodyPr wrap="square" lIns="0" tIns="0" rIns="0" bIns="0" rtlCol="0" anchor="ctr"/>
+          <a:lstStyle/>
+          <a:p>
+            <a:pPr marL="0" indent="0">
+              <a:buNone/>
+            </a:pPr>
+            <a:r>
+              <a:rPr lang="en-US" sz="1500" b="1" dirty="0">
+                <a:solidFill>
+                  <a:srgbClr val="6B7BA8"/>
+                </a:solidFill>
+                <a:latin typeface="Calibri" pitchFamily="34" charset="0"/>
+                <a:ea typeface="Calibri" pitchFamily="34" charset="-122"/>
+                <a:cs typeface="Calibri" pitchFamily="34" charset="-120"/>
+              </a:rPr>
+              <a:t>→</a:t>
+            </a:r>
+            <a:endParaRPr lang="en-US" sz="1500" dirty="0"/>
+          </a:p>
+        </p:txBody>
+      </p:sp>
+      <p:sp>
+        <p:nvSpPr>
+          <p:cNvPr id="20" name="Text 18"/>
+          <p:cNvSpPr/>
+          <p:nvPr/>
+        </p:nvSpPr>
+        <p:spPr>
+          <a:xfrm>
+            <a:off x="6830568" y="3776472"/>
+            <a:ext cx="4617720" cy="749808"/>
+          </a:xfrm>
+          <a:prstGeom prst="rect">
+            <a:avLst/>
+          </a:prstGeom>
+          <a:noFill/>
+          <a:ln/>
+        </p:spPr>
+        <p:txBody>
+          <a:bodyPr wrap="square" lIns="0" tIns="0" rIns="0" bIns="0" rtlCol="0" anchor="t"/>
+          <a:lstStyle/>
+          <a:p>
+            <a:pPr marL="0" indent="0">
               <a:lnSpc>
                 <a:spcPct val="105000"/>
               </a:lnSpc>
               <a:buNone/>
             </a:pPr>
             <a:r>
+              <a:rPr lang="en-US" sz="1250" b="1" dirty="0">
+                <a:solidFill>
+                  <a:srgbClr val="F0F4FF"/>
+                </a:solidFill>
+                <a:latin typeface="Calibri" pitchFamily="34" charset="0"/>
+                <a:ea typeface="Calibri" pitchFamily="34" charset="-122"/>
+                <a:cs typeface="Calibri" pitchFamily="34" charset="-120"/>
+              </a:rPr>
+              <a:t>Fraud-network graph intelligence  </a:t>
+            </a:r>
+            <a:r>
               <a:rPr lang="en-US" sz="1250" dirty="0">
                 <a:solidFill>
                   <a:srgbClr val="9BAAD4"/>
@@ -3281,7 +3113,7 @@
                 <a:ea typeface="Calibri" pitchFamily="34" charset="-122"/>
                 <a:cs typeface="Calibri" pitchFamily="34" charset="-120"/>
               </a:rPr>
-              <a:t>— computer-vision note verification</a:t>
+              <a:t>— linking mules &amp; scammer infrastructure</a:t>
             </a:r>
             <a:endParaRPr lang="en-US" sz="1250" dirty="0"/>
           </a:p>
@@ -3289,13 +3121,13 @@
       </p:sp>
       <p:sp>
         <p:nvSpPr>
-          <p:cNvPr id="19" name="Text 17"/>
-          <p:cNvSpPr/>
-          <p:nvPr/>
-        </p:nvSpPr>
-        <p:spPr>
-          <a:xfrm>
-            <a:off x="6446520" y="3803904"/>
+          <p:cNvPr id="21" name="Text 19"/>
+          <p:cNvSpPr/>
+          <p:nvPr/>
+        </p:nvSpPr>
+        <p:spPr>
+          <a:xfrm>
+            <a:off x="6446520" y="4608576"/>
             <a:ext cx="365760" cy="365760"/>
           </a:xfrm>
           <a:prstGeom prst="rect">
@@ -3308,7 +3140,7 @@
           <a:bodyPr wrap="square" lIns="0" tIns="0" rIns="0" bIns="0" rtlCol="0" anchor="ctr"/>
           <a:lstStyle/>
           <a:p>
-            <a:pPr indent="0" marL="0">
+            <a:pPr marL="0" indent="0">
               <a:buNone/>
             </a:pPr>
             <a:r>
@@ -3328,13 +3160,13 @@
       </p:sp>
       <p:sp>
         <p:nvSpPr>
-          <p:cNvPr id="20" name="Text 18"/>
-          <p:cNvSpPr/>
-          <p:nvPr/>
-        </p:nvSpPr>
-        <p:spPr>
-          <a:xfrm>
-            <a:off x="6830568" y="3776472"/>
+          <p:cNvPr id="22" name="Text 20"/>
+          <p:cNvSpPr/>
+          <p:nvPr/>
+        </p:nvSpPr>
+        <p:spPr>
+          <a:xfrm>
+            <a:off x="6830568" y="4581144"/>
             <a:ext cx="4617720" cy="749808"/>
           </a:xfrm>
           <a:prstGeom prst="rect">
@@ -3347,7 +3179,7 @@
           <a:bodyPr wrap="square" lIns="0" tIns="0" rIns="0" bIns="0" rtlCol="0" anchor="t"/>
           <a:lstStyle/>
           <a:p>
-            <a:pPr indent="0" marL="0">
+            <a:pPr marL="0" indent="0">
               <a:lnSpc>
                 <a:spcPct val="105000"/>
               </a:lnSpc>
@@ -3362,96 +3194,90 @@
                 <a:ea typeface="Calibri" pitchFamily="34" charset="-122"/>
                 <a:cs typeface="Calibri" pitchFamily="34" charset="-120"/>
               </a:rPr>
-              <a:t>Fraud-network graph intelligence  </a:t>
-            </a:r>
-            <a:pPr indent="0" marL="0">
+              <a:t>Geospatial crime mapping  </a:t>
+            </a:r>
+            <a:r>
+              <a:rPr lang="en-US" sz="1250" dirty="0">
+                <a:solidFill>
+                  <a:srgbClr val="9BAAD4"/>
+                </a:solidFill>
+                <a:latin typeface="Calibri" pitchFamily="34" charset="0"/>
+                <a:ea typeface="Calibri" pitchFamily="34" charset="-122"/>
+                <a:cs typeface="Calibri" pitchFamily="34" charset="-120"/>
+              </a:rPr>
+              <a:t>— hotspot &amp; patrol prioritisation</a:t>
+            </a:r>
+            <a:endParaRPr lang="en-US" sz="1250" dirty="0"/>
+          </a:p>
+        </p:txBody>
+      </p:sp>
+      <p:sp>
+        <p:nvSpPr>
+          <p:cNvPr id="23" name="Text 21"/>
+          <p:cNvSpPr/>
+          <p:nvPr/>
+        </p:nvSpPr>
+        <p:spPr>
+          <a:xfrm>
+            <a:off x="6446520" y="5413248"/>
+            <a:ext cx="365760" cy="365760"/>
+          </a:xfrm>
+          <a:prstGeom prst="rect">
+            <a:avLst/>
+          </a:prstGeom>
+          <a:noFill/>
+          <a:ln/>
+        </p:spPr>
+        <p:txBody>
+          <a:bodyPr wrap="square" lIns="0" tIns="0" rIns="0" bIns="0" rtlCol="0" anchor="ctr"/>
+          <a:lstStyle/>
+          <a:p>
+            <a:pPr marL="0" indent="0">
+              <a:buNone/>
+            </a:pPr>
+            <a:r>
+              <a:rPr lang="en-US" sz="1500" b="1" dirty="0">
+                <a:solidFill>
+                  <a:srgbClr val="6B7BA8"/>
+                </a:solidFill>
+                <a:latin typeface="Calibri" pitchFamily="34" charset="0"/>
+                <a:ea typeface="Calibri" pitchFamily="34" charset="-122"/>
+                <a:cs typeface="Calibri" pitchFamily="34" charset="-120"/>
+              </a:rPr>
+              <a:t>→</a:t>
+            </a:r>
+            <a:endParaRPr lang="en-US" sz="1500" dirty="0"/>
+          </a:p>
+        </p:txBody>
+      </p:sp>
+      <p:sp>
+        <p:nvSpPr>
+          <p:cNvPr id="24" name="Text 22"/>
+          <p:cNvSpPr/>
+          <p:nvPr/>
+        </p:nvSpPr>
+        <p:spPr>
+          <a:xfrm>
+            <a:off x="6830568" y="5385816"/>
+            <a:ext cx="4617720" cy="749808"/>
+          </a:xfrm>
+          <a:prstGeom prst="rect">
+            <a:avLst/>
+          </a:prstGeom>
+          <a:noFill/>
+          <a:ln/>
+        </p:spPr>
+        <p:txBody>
+          <a:bodyPr wrap="square" lIns="0" tIns="0" rIns="0" bIns="0" rtlCol="0" anchor="t"/>
+          <a:lstStyle/>
+          <a:p>
+            <a:pPr marL="0" indent="0">
               <a:lnSpc>
                 <a:spcPct val="105000"/>
               </a:lnSpc>
               <a:buNone/>
             </a:pPr>
             <a:r>
-              <a:rPr lang="en-US" sz="1250" dirty="0">
-                <a:solidFill>
-                  <a:srgbClr val="9BAAD4"/>
-                </a:solidFill>
-                <a:latin typeface="Calibri" pitchFamily="34" charset="0"/>
-                <a:ea typeface="Calibri" pitchFamily="34" charset="-122"/>
-                <a:cs typeface="Calibri" pitchFamily="34" charset="-120"/>
-              </a:rPr>
-              <a:t>— linking mules &amp; scammer infrastructure</a:t>
-            </a:r>
-            <a:endParaRPr lang="en-US" sz="1250" dirty="0"/>
-          </a:p>
-        </p:txBody>
-      </p:sp>
-      <p:sp>
-        <p:nvSpPr>
-          <p:cNvPr id="21" name="Text 19"/>
-          <p:cNvSpPr/>
-          <p:nvPr/>
-        </p:nvSpPr>
-        <p:spPr>
-          <a:xfrm>
-            <a:off x="6446520" y="4608576"/>
-            <a:ext cx="365760" cy="365760"/>
-          </a:xfrm>
-          <a:prstGeom prst="rect">
-            <a:avLst/>
-          </a:prstGeom>
-          <a:noFill/>
-          <a:ln/>
-        </p:spPr>
-        <p:txBody>
-          <a:bodyPr wrap="square" lIns="0" tIns="0" rIns="0" bIns="0" rtlCol="0" anchor="ctr"/>
-          <a:lstStyle/>
-          <a:p>
-            <a:pPr indent="0" marL="0">
-              <a:buNone/>
-            </a:pPr>
-            <a:r>
-              <a:rPr lang="en-US" sz="1500" b="1" dirty="0">
-                <a:solidFill>
-                  <a:srgbClr val="6B7BA8"/>
-                </a:solidFill>
-                <a:latin typeface="Calibri" pitchFamily="34" charset="0"/>
-                <a:ea typeface="Calibri" pitchFamily="34" charset="-122"/>
-                <a:cs typeface="Calibri" pitchFamily="34" charset="-120"/>
-              </a:rPr>
-              <a:t>→</a:t>
-            </a:r>
-            <a:endParaRPr lang="en-US" sz="1500" dirty="0"/>
-          </a:p>
-        </p:txBody>
-      </p:sp>
-      <p:sp>
-        <p:nvSpPr>
-          <p:cNvPr id="22" name="Text 20"/>
-          <p:cNvSpPr/>
-          <p:nvPr/>
-        </p:nvSpPr>
-        <p:spPr>
-          <a:xfrm>
-            <a:off x="6830568" y="4581144"/>
-            <a:ext cx="4617720" cy="749808"/>
-          </a:xfrm>
-          <a:prstGeom prst="rect">
-            <a:avLst/>
-          </a:prstGeom>
-          <a:noFill/>
-          <a:ln/>
-        </p:spPr>
-        <p:txBody>
-          <a:bodyPr wrap="square" lIns="0" tIns="0" rIns="0" bIns="0" rtlCol="0" anchor="t"/>
-          <a:lstStyle/>
-          <a:p>
-            <a:pPr indent="0" marL="0">
-              <a:lnSpc>
-                <a:spcPct val="105000"/>
-              </a:lnSpc>
-              <a:buNone/>
-            </a:pPr>
-            <a:r>
               <a:rPr lang="en-US" sz="1250" b="1" dirty="0">
                 <a:solidFill>
                   <a:srgbClr val="F0F4FF"/>
@@ -3460,112 +3286,8 @@
                 <a:ea typeface="Calibri" pitchFamily="34" charset="-122"/>
                 <a:cs typeface="Calibri" pitchFamily="34" charset="-120"/>
               </a:rPr>
-              <a:t>Geospatial crime mapping  </a:t>
-            </a:r>
-            <a:pPr indent="0" marL="0">
-              <a:lnSpc>
-                <a:spcPct val="105000"/>
-              </a:lnSpc>
-              <a:buNone/>
-            </a:pPr>
-            <a:r>
-              <a:rPr lang="en-US" sz="1250" dirty="0">
-                <a:solidFill>
-                  <a:srgbClr val="9BAAD4"/>
-                </a:solidFill>
-                <a:latin typeface="Calibri" pitchFamily="34" charset="0"/>
-                <a:ea typeface="Calibri" pitchFamily="34" charset="-122"/>
-                <a:cs typeface="Calibri" pitchFamily="34" charset="-120"/>
-              </a:rPr>
-              <a:t>— hotspot &amp; patrol prioritisation</a:t>
-            </a:r>
-            <a:endParaRPr lang="en-US" sz="1250" dirty="0"/>
-          </a:p>
-        </p:txBody>
-      </p:sp>
-      <p:sp>
-        <p:nvSpPr>
-          <p:cNvPr id="23" name="Text 21"/>
-          <p:cNvSpPr/>
-          <p:nvPr/>
-        </p:nvSpPr>
-        <p:spPr>
-          <a:xfrm>
-            <a:off x="6446520" y="5413248"/>
-            <a:ext cx="365760" cy="365760"/>
-          </a:xfrm>
-          <a:prstGeom prst="rect">
-            <a:avLst/>
-          </a:prstGeom>
-          <a:noFill/>
-          <a:ln/>
-        </p:spPr>
-        <p:txBody>
-          <a:bodyPr wrap="square" lIns="0" tIns="0" rIns="0" bIns="0" rtlCol="0" anchor="ctr"/>
-          <a:lstStyle/>
-          <a:p>
-            <a:pPr indent="0" marL="0">
-              <a:buNone/>
-            </a:pPr>
-            <a:r>
-              <a:rPr lang="en-US" sz="1500" b="1" dirty="0">
-                <a:solidFill>
-                  <a:srgbClr val="6B7BA8"/>
-                </a:solidFill>
-                <a:latin typeface="Calibri" pitchFamily="34" charset="0"/>
-                <a:ea typeface="Calibri" pitchFamily="34" charset="-122"/>
-                <a:cs typeface="Calibri" pitchFamily="34" charset="-120"/>
-              </a:rPr>
-              <a:t>→</a:t>
-            </a:r>
-            <a:endParaRPr lang="en-US" sz="1500" dirty="0"/>
-          </a:p>
-        </p:txBody>
-      </p:sp>
-      <p:sp>
-        <p:nvSpPr>
-          <p:cNvPr id="24" name="Text 22"/>
-          <p:cNvSpPr/>
-          <p:nvPr/>
-        </p:nvSpPr>
-        <p:spPr>
-          <a:xfrm>
-            <a:off x="6830568" y="5385816"/>
-            <a:ext cx="4617720" cy="749808"/>
-          </a:xfrm>
-          <a:prstGeom prst="rect">
-            <a:avLst/>
-          </a:prstGeom>
-          <a:noFill/>
-          <a:ln/>
-        </p:spPr>
-        <p:txBody>
-          <a:bodyPr wrap="square" lIns="0" tIns="0" rIns="0" bIns="0" rtlCol="0" anchor="t"/>
-          <a:lstStyle/>
-          <a:p>
-            <a:pPr indent="0" marL="0">
-              <a:lnSpc>
-                <a:spcPct val="105000"/>
-              </a:lnSpc>
-              <a:buNone/>
-            </a:pPr>
-            <a:r>
-              <a:rPr lang="en-US" sz="1250" b="1" dirty="0">
-                <a:solidFill>
-                  <a:srgbClr val="F0F4FF"/>
-                </a:solidFill>
-                <a:latin typeface="Calibri" pitchFamily="34" charset="0"/>
-                <a:ea typeface="Calibri" pitchFamily="34" charset="-122"/>
-                <a:cs typeface="Calibri" pitchFamily="34" charset="-120"/>
-              </a:rPr>
               <a:t>Telecom integration · 12 languages  </a:t>
             </a:r>
-            <a:pPr indent="0" marL="0">
-              <a:lnSpc>
-                <a:spcPct val="105000"/>
-              </a:lnSpc>
-              <a:buNone/>
-            </a:pPr>
             <a:r>
               <a:rPr lang="en-US" sz="1250" dirty="0">
                 <a:solidFill>
@@ -3597,6 +3319,7 @@
         <a:solidFill>
           <a:srgbClr val="0C1330"/>
         </a:solidFill>
+        <a:effectLst/>
       </p:bgPr>
     </p:bg>
     <p:spTree>
@@ -3634,11 +3357,11 @@
           <a:bodyPr wrap="square" lIns="0" tIns="0" rIns="0" bIns="0" rtlCol="0" anchor="ctr"/>
           <a:lstStyle/>
           <a:p>
-            <a:pPr indent="0" marL="0">
-              <a:buNone/>
-            </a:pPr>
-            <a:r>
-              <a:rPr lang="en-US" sz="1100" b="1" spc="300" kern="0" dirty="0">
+            <a:pPr marL="0" indent="0">
+              <a:buNone/>
+            </a:pPr>
+            <a:r>
+              <a:rPr lang="en-US" sz="1100" b="1" kern="0" spc="300" dirty="0">
                 <a:solidFill>
                   <a:srgbClr val="0B1436"/>
                 </a:solidFill>
@@ -3673,7 +3396,7 @@
           <a:bodyPr wrap="square" lIns="0" tIns="0" rIns="0" bIns="0" rtlCol="0" anchor="ctr"/>
           <a:lstStyle/>
           <a:p>
-            <a:pPr indent="0" marL="0">
+            <a:pPr marL="0" indent="0">
               <a:buNone/>
             </a:pPr>
             <a:r>
@@ -3791,7 +3514,7 @@
           <a:bodyPr wrap="square" lIns="0" tIns="0" rIns="0" bIns="0" rtlCol="0" anchor="ctr"/>
           <a:lstStyle/>
           <a:p>
-            <a:pPr algn="ctr" indent="0" marL="0">
+            <a:pPr marL="0" indent="0" algn="ctr">
               <a:buNone/>
             </a:pPr>
             <a:r>
@@ -3830,7 +3553,7 @@
           <a:bodyPr wrap="square" lIns="0" tIns="0" rIns="0" bIns="0" rtlCol="0" anchor="ctr"/>
           <a:lstStyle/>
           <a:p>
-            <a:pPr indent="0" marL="0">
+            <a:pPr marL="0" indent="0">
               <a:buNone/>
             </a:pPr>
             <a:r>
@@ -3869,7 +3592,7 @@
           <a:bodyPr wrap="square" lIns="0" tIns="0" rIns="0" bIns="0" rtlCol="0" anchor="t"/>
           <a:lstStyle/>
           <a:p>
-            <a:pPr indent="0" marL="0">
+            <a:pPr marL="0" indent="0">
               <a:lnSpc>
                 <a:spcPct val="114000"/>
               </a:lnSpc>
@@ -3990,7 +3713,7 @@
           <a:bodyPr wrap="square" lIns="0" tIns="0" rIns="0" bIns="0" rtlCol="0" anchor="ctr"/>
           <a:lstStyle/>
           <a:p>
-            <a:pPr algn="ctr" indent="0" marL="0">
+            <a:pPr marL="0" indent="0" algn="ctr">
               <a:buNone/>
             </a:pPr>
             <a:r>
@@ -4029,7 +3752,7 @@
           <a:bodyPr wrap="square" lIns="0" tIns="0" rIns="0" bIns="0" rtlCol="0" anchor="ctr"/>
           <a:lstStyle/>
           <a:p>
-            <a:pPr indent="0" marL="0">
+            <a:pPr marL="0" indent="0">
               <a:buNone/>
             </a:pPr>
             <a:r>
@@ -4068,7 +3791,7 @@
           <a:bodyPr wrap="square" lIns="0" tIns="0" rIns="0" bIns="0" rtlCol="0" anchor="t"/>
           <a:lstStyle/>
           <a:p>
-            <a:pPr indent="0" marL="0">
+            <a:pPr marL="0" indent="0">
               <a:lnSpc>
                 <a:spcPct val="114000"/>
               </a:lnSpc>
@@ -4189,7 +3912,7 @@
           <a:bodyPr wrap="square" lIns="0" tIns="0" rIns="0" bIns="0" rtlCol="0" anchor="ctr"/>
           <a:lstStyle/>
           <a:p>
-            <a:pPr algn="ctr" indent="0" marL="0">
+            <a:pPr marL="0" indent="0" algn="ctr">
               <a:buNone/>
             </a:pPr>
             <a:r>
@@ -4228,7 +3951,7 @@
           <a:bodyPr wrap="square" lIns="0" tIns="0" rIns="0" bIns="0" rtlCol="0" anchor="ctr"/>
           <a:lstStyle/>
           <a:p>
-            <a:pPr indent="0" marL="0">
+            <a:pPr marL="0" indent="0">
               <a:buNone/>
             </a:pPr>
             <a:r>
@@ -4267,7 +3990,7 @@
           <a:bodyPr wrap="square" lIns="0" tIns="0" rIns="0" bIns="0" rtlCol="0" anchor="t"/>
           <a:lstStyle/>
           <a:p>
-            <a:pPr indent="0" marL="0">
+            <a:pPr marL="0" indent="0">
               <a:lnSpc>
                 <a:spcPct val="114000"/>
               </a:lnSpc>
@@ -4309,7 +4032,7 @@
           <a:bodyPr wrap="square" lIns="0" tIns="0" rIns="0" bIns="0" rtlCol="0" anchor="ctr"/>
           <a:lstStyle/>
           <a:p>
-            <a:pPr indent="0" marL="0">
+            <a:pPr marL="0" indent="0">
               <a:buNone/>
             </a:pPr>
             <a:r>
@@ -4343,6 +4066,7 @@
         <a:solidFill>
           <a:srgbClr val="080D20"/>
         </a:solidFill>
+        <a:effectLst/>
       </p:bgPr>
     </p:bg>
     <p:spTree>
@@ -4461,7 +4185,7 @@
           <a:bodyPr wrap="square" lIns="0" tIns="0" rIns="0" bIns="0" rtlCol="0" anchor="ctr"/>
           <a:lstStyle/>
           <a:p>
-            <a:pPr algn="ctr" indent="0" marL="0">
+            <a:pPr marL="0" indent="0" algn="ctr">
               <a:buNone/>
             </a:pPr>
             <a:r>
@@ -4500,7 +4224,7 @@
           <a:bodyPr wrap="square" lIns="0" tIns="0" rIns="0" bIns="0" rtlCol="0" anchor="ctr"/>
           <a:lstStyle/>
           <a:p>
-            <a:pPr indent="0" marL="0">
+            <a:pPr marL="0" indent="0">
               <a:buNone/>
             </a:pPr>
             <a:r>
@@ -4514,9 +4238,6 @@
               </a:rPr>
               <a:t>Fraud</a:t>
             </a:r>
-            <a:pPr indent="0" marL="0">
-              <a:buNone/>
-            </a:pPr>
             <a:r>
               <a:rPr lang="en-US" sz="2900" b="1" dirty="0">
                 <a:solidFill>
@@ -4553,7 +4274,7 @@
           <a:bodyPr wrap="square" lIns="0" tIns="0" rIns="0" bIns="0" rtlCol="0" anchor="ctr"/>
           <a:lstStyle/>
           <a:p>
-            <a:pPr indent="0" marL="0">
+            <a:pPr marL="0" indent="0">
               <a:buNone/>
             </a:pPr>
             <a:r>
@@ -4592,7 +4313,7 @@
           <a:bodyPr wrap="square" lIns="0" tIns="0" rIns="0" bIns="0" rtlCol="0" anchor="ctr"/>
           <a:lstStyle/>
           <a:p>
-            <a:pPr indent="0" marL="0">
+            <a:pPr marL="0" indent="0">
               <a:lnSpc>
                 <a:spcPct val="110000"/>
               </a:lnSpc>
@@ -4663,7 +4384,7 @@
           <a:bodyPr wrap="square" lIns="0" tIns="0" rIns="0" bIns="0" rtlCol="0" anchor="ctr"/>
           <a:lstStyle/>
           <a:p>
-            <a:pPr algn="ctr" indent="0" marL="0">
+            <a:pPr marL="0" indent="0" algn="ctr">
               <a:buNone/>
             </a:pPr>
             <a:r>
@@ -4731,7 +4452,7 @@
           <a:bodyPr wrap="square" lIns="0" tIns="0" rIns="0" bIns="0" rtlCol="0" anchor="ctr"/>
           <a:lstStyle/>
           <a:p>
-            <a:pPr algn="ctr" indent="0" marL="0">
+            <a:pPr marL="0" indent="0" algn="ctr">
               <a:buNone/>
             </a:pPr>
             <a:r>
@@ -4799,7 +4520,7 @@
           <a:bodyPr wrap="square" lIns="0" tIns="0" rIns="0" bIns="0" rtlCol="0" anchor="ctr"/>
           <a:lstStyle/>
           <a:p>
-            <a:pPr algn="ctr" indent="0" marL="0">
+            <a:pPr marL="0" indent="0" algn="ctr">
               <a:buNone/>
             </a:pPr>
             <a:r>
@@ -4867,7 +4588,7 @@
           <a:bodyPr wrap="square" lIns="0" tIns="0" rIns="0" bIns="0" rtlCol="0" anchor="ctr"/>
           <a:lstStyle/>
           <a:p>
-            <a:pPr algn="ctr" indent="0" marL="0">
+            <a:pPr marL="0" indent="0" algn="ctr">
               <a:buNone/>
             </a:pPr>
             <a:r>
@@ -4906,7 +4627,7 @@
           <a:bodyPr wrap="square" lIns="0" tIns="0" rIns="0" bIns="0" rtlCol="0" anchor="ctr"/>
           <a:lstStyle/>
           <a:p>
-            <a:pPr indent="0" marL="0">
+            <a:pPr marL="0" indent="0">
               <a:buNone/>
             </a:pPr>
             <a:r>
@@ -4940,6 +4661,7 @@
         <a:solidFill>
           <a:srgbClr val="0C1330"/>
         </a:solidFill>
+        <a:effectLst/>
       </p:bgPr>
     </p:bg>
     <p:spTree>
@@ -5004,11 +4726,11 @@
           <a:bodyPr wrap="square" lIns="0" tIns="0" rIns="0" bIns="0" rtlCol="0" anchor="ctr"/>
           <a:lstStyle/>
           <a:p>
-            <a:pPr indent="0" marL="0">
-              <a:buNone/>
-            </a:pPr>
-            <a:r>
-              <a:rPr lang="en-US" sz="1100" b="1" spc="300" kern="0" dirty="0">
+            <a:pPr marL="0" indent="0">
+              <a:buNone/>
+            </a:pPr>
+            <a:r>
+              <a:rPr lang="en-US" sz="1100" b="1" kern="0" spc="300" dirty="0">
                 <a:solidFill>
                   <a:srgbClr val="22D3EE"/>
                 </a:solidFill>
@@ -5043,7 +4765,7 @@
           <a:bodyPr wrap="square" lIns="0" tIns="0" rIns="0" bIns="0" rtlCol="0" anchor="ctr"/>
           <a:lstStyle/>
           <a:p>
-            <a:pPr indent="0" marL="0">
+            <a:pPr marL="0" indent="0">
               <a:buNone/>
             </a:pPr>
             <a:r>
@@ -5087,7 +4809,7 @@
             <a:prstDash val="solid"/>
           </a:ln>
           <a:effectLst>
-            <a:outerShdw sx="100000" sy="100000" kx="0" ky="0" algn="bl" rotWithShape="0" blurRad="114300" dist="50800" dir="5400000">
+            <a:outerShdw blurRad="114300" dist="50800" dir="5400000" algn="bl" rotWithShape="0">
               <a:srgbClr val="000000">
                 <a:alpha val="28000"/>
               </a:srgbClr>
@@ -5145,7 +4867,7 @@
           <a:bodyPr wrap="square" lIns="0" tIns="0" rIns="0" bIns="0" rtlCol="0" anchor="ctr"/>
           <a:lstStyle/>
           <a:p>
-            <a:pPr algn="ctr" indent="0" marL="0">
+            <a:pPr marL="0" indent="0" algn="ctr">
               <a:buNone/>
             </a:pPr>
             <a:r>
@@ -5184,11 +4906,11 @@
           <a:bodyPr wrap="square" lIns="0" tIns="0" rIns="0" bIns="0" rtlCol="0" anchor="ctr"/>
           <a:lstStyle/>
           <a:p>
-            <a:pPr indent="0" marL="0">
-              <a:buNone/>
-            </a:pPr>
-            <a:r>
-              <a:rPr lang="en-US" sz="1250" b="1" spc="200" kern="0" dirty="0">
+            <a:pPr marL="0" indent="0">
+              <a:buNone/>
+            </a:pPr>
+            <a:r>
+              <a:rPr lang="en-US" sz="1250" b="1" kern="0" spc="200" dirty="0">
                 <a:solidFill>
                   <a:srgbClr val="FB5779"/>
                 </a:solidFill>
@@ -5223,7 +4945,7 @@
           <a:bodyPr wrap="square" lIns="0" tIns="0" rIns="0" bIns="0" rtlCol="0" anchor="t"/>
           <a:lstStyle/>
           <a:p>
-            <a:pPr indent="0" marL="0">
+            <a:pPr marL="0" indent="0">
               <a:lnSpc>
                 <a:spcPct val="106000"/>
               </a:lnSpc>
@@ -5270,7 +4992,7 @@
             <a:prstDash val="solid"/>
           </a:ln>
           <a:effectLst>
-            <a:outerShdw sx="100000" sy="100000" kx="0" ky="0" algn="bl" rotWithShape="0" blurRad="114300" dist="50800" dir="5400000">
+            <a:outerShdw blurRad="114300" dist="50800" dir="5400000" algn="bl" rotWithShape="0">
               <a:srgbClr val="000000">
                 <a:alpha val="28000"/>
               </a:srgbClr>
@@ -5328,7 +5050,7 @@
           <a:bodyPr wrap="square" lIns="0" tIns="0" rIns="0" bIns="0" rtlCol="0" anchor="ctr"/>
           <a:lstStyle/>
           <a:p>
-            <a:pPr algn="ctr" indent="0" marL="0">
+            <a:pPr marL="0" indent="0" algn="ctr">
               <a:buNone/>
             </a:pPr>
             <a:r>
@@ -5367,11 +5089,11 @@
           <a:bodyPr wrap="square" lIns="0" tIns="0" rIns="0" bIns="0" rtlCol="0" anchor="ctr"/>
           <a:lstStyle/>
           <a:p>
-            <a:pPr indent="0" marL="0">
-              <a:buNone/>
-            </a:pPr>
-            <a:r>
-              <a:rPr lang="en-US" sz="1250" b="1" spc="200" kern="0" dirty="0">
+            <a:pPr marL="0" indent="0">
+              <a:buNone/>
+            </a:pPr>
+            <a:r>
+              <a:rPr lang="en-US" sz="1250" b="1" kern="0" spc="200" dirty="0">
                 <a:solidFill>
                   <a:srgbClr val="22D3EE"/>
                 </a:solidFill>
@@ -5406,7 +5128,7 @@
           <a:bodyPr wrap="square" lIns="0" tIns="0" rIns="0" bIns="0" rtlCol="0" anchor="t"/>
           <a:lstStyle/>
           <a:p>
-            <a:pPr indent="0" marL="0">
+            <a:pPr marL="0" indent="0">
               <a:lnSpc>
                 <a:spcPct val="106000"/>
               </a:lnSpc>
@@ -5453,7 +5175,7 @@
             <a:prstDash val="solid"/>
           </a:ln>
           <a:effectLst>
-            <a:outerShdw sx="100000" sy="100000" kx="0" ky="0" algn="bl" rotWithShape="0" blurRad="114300" dist="50800" dir="5400000">
+            <a:outerShdw blurRad="114300" dist="50800" dir="5400000" algn="bl" rotWithShape="0">
               <a:srgbClr val="000000">
                 <a:alpha val="28000"/>
               </a:srgbClr>
@@ -5511,7 +5233,7 @@
           <a:bodyPr wrap="square" lIns="0" tIns="0" rIns="0" bIns="0" rtlCol="0" anchor="ctr"/>
           <a:lstStyle/>
           <a:p>
-            <a:pPr algn="ctr" indent="0" marL="0">
+            <a:pPr marL="0" indent="0" algn="ctr">
               <a:buNone/>
             </a:pPr>
             <a:r>
@@ -5550,11 +5272,11 @@
           <a:bodyPr wrap="square" lIns="0" tIns="0" rIns="0" bIns="0" rtlCol="0" anchor="ctr"/>
           <a:lstStyle/>
           <a:p>
-            <a:pPr indent="0" marL="0">
-              <a:buNone/>
-            </a:pPr>
-            <a:r>
-              <a:rPr lang="en-US" sz="1250" b="1" spc="200" kern="0" dirty="0">
+            <a:pPr marL="0" indent="0">
+              <a:buNone/>
+            </a:pPr>
+            <a:r>
+              <a:rPr lang="en-US" sz="1250" b="1" kern="0" spc="200" dirty="0">
                 <a:solidFill>
                   <a:srgbClr val="34D399"/>
                 </a:solidFill>
@@ -5589,7 +5311,7 @@
           <a:bodyPr wrap="square" lIns="0" tIns="0" rIns="0" bIns="0" rtlCol="0" anchor="t"/>
           <a:lstStyle/>
           <a:p>
-            <a:pPr indent="0" marL="0">
+            <a:pPr marL="0" indent="0">
               <a:lnSpc>
                 <a:spcPct val="106000"/>
               </a:lnSpc>
@@ -5636,7 +5358,7 @@
             <a:prstDash val="solid"/>
           </a:ln>
           <a:effectLst>
-            <a:outerShdw sx="100000" sy="100000" kx="0" ky="0" algn="bl" rotWithShape="0" blurRad="114300" dist="50800" dir="5400000">
+            <a:outerShdw blurRad="114300" dist="50800" dir="5400000" algn="bl" rotWithShape="0">
               <a:srgbClr val="000000">
                 <a:alpha val="28000"/>
               </a:srgbClr>
@@ -5694,7 +5416,7 @@
           <a:bodyPr wrap="square" lIns="0" tIns="0" rIns="0" bIns="0" rtlCol="0" anchor="ctr"/>
           <a:lstStyle/>
           <a:p>
-            <a:pPr algn="ctr" indent="0" marL="0">
+            <a:pPr marL="0" indent="0" algn="ctr">
               <a:buNone/>
             </a:pPr>
             <a:r>
@@ -5733,11 +5455,11 @@
           <a:bodyPr wrap="square" lIns="0" tIns="0" rIns="0" bIns="0" rtlCol="0" anchor="ctr"/>
           <a:lstStyle/>
           <a:p>
-            <a:pPr indent="0" marL="0">
-              <a:buNone/>
-            </a:pPr>
-            <a:r>
-              <a:rPr lang="en-US" sz="1250" b="1" spc="200" kern="0" dirty="0">
+            <a:pPr marL="0" indent="0">
+              <a:buNone/>
+            </a:pPr>
+            <a:r>
+              <a:rPr lang="en-US" sz="1250" b="1" kern="0" spc="200" dirty="0">
                 <a:solidFill>
                   <a:srgbClr val="FBBF24"/>
                 </a:solidFill>
@@ -5772,7 +5494,7 @@
           <a:bodyPr wrap="square" lIns="0" tIns="0" rIns="0" bIns="0" rtlCol="0" anchor="t"/>
           <a:lstStyle/>
           <a:p>
-            <a:pPr indent="0" marL="0">
+            <a:pPr marL="0" indent="0">
               <a:lnSpc>
                 <a:spcPct val="106000"/>
               </a:lnSpc>
@@ -5809,6 +5531,7 @@
         <a:solidFill>
           <a:srgbClr val="0C1330"/>
         </a:solidFill>
+        <a:effectLst/>
       </p:bgPr>
     </p:bg>
     <p:spTree>
@@ -5873,11 +5596,11 @@
           <a:bodyPr wrap="square" lIns="0" tIns="0" rIns="0" bIns="0" rtlCol="0" anchor="ctr"/>
           <a:lstStyle/>
           <a:p>
-            <a:pPr indent="0" marL="0">
-              <a:buNone/>
-            </a:pPr>
-            <a:r>
-              <a:rPr lang="en-US" sz="1100" b="1" spc="300" kern="0" dirty="0">
+            <a:pPr marL="0" indent="0">
+              <a:buNone/>
+            </a:pPr>
+            <a:r>
+              <a:rPr lang="en-US" sz="1100" b="1" kern="0" spc="300" dirty="0">
                 <a:solidFill>
                   <a:srgbClr val="FB5779"/>
                 </a:solidFill>
@@ -5912,7 +5635,7 @@
           <a:bodyPr wrap="square" lIns="0" tIns="0" rIns="0" bIns="0" rtlCol="0" anchor="ctr"/>
           <a:lstStyle/>
           <a:p>
-            <a:pPr indent="0" marL="0">
+            <a:pPr marL="0" indent="0">
               <a:buNone/>
             </a:pPr>
             <a:r>
@@ -5956,7 +5679,7 @@
             <a:prstDash val="solid"/>
           </a:ln>
           <a:effectLst>
-            <a:outerShdw sx="100000" sy="100000" kx="0" ky="0" algn="bl" rotWithShape="0" blurRad="114300" dist="50800" dir="5400000">
+            <a:outerShdw blurRad="114300" dist="50800" dir="5400000" algn="bl" rotWithShape="0">
               <a:srgbClr val="000000">
                 <a:alpha val="28000"/>
               </a:srgbClr>
@@ -6010,7 +5733,7 @@
           <a:bodyPr wrap="square" lIns="0" tIns="0" rIns="0" bIns="0" rtlCol="0" anchor="ctr"/>
           <a:lstStyle/>
           <a:p>
-            <a:pPr indent="0" marL="0">
+            <a:pPr marL="0" indent="0">
               <a:buNone/>
             </a:pPr>
             <a:r>
@@ -6049,7 +5772,7 @@
           <a:bodyPr wrap="square" lIns="0" tIns="0" rIns="0" bIns="0" rtlCol="0" anchor="ctr"/>
           <a:lstStyle/>
           <a:p>
-            <a:pPr indent="0" marL="0">
+            <a:pPr marL="0" indent="0">
               <a:buNone/>
             </a:pPr>
             <a:r>
@@ -6093,7 +5816,7 @@
             <a:prstDash val="solid"/>
           </a:ln>
           <a:effectLst>
-            <a:outerShdw sx="100000" sy="100000" kx="0" ky="0" algn="bl" rotWithShape="0" blurRad="114300" dist="50800" dir="5400000">
+            <a:outerShdw blurRad="114300" dist="50800" dir="5400000" algn="bl" rotWithShape="0">
               <a:srgbClr val="000000">
                 <a:alpha val="28000"/>
               </a:srgbClr>
@@ -6147,7 +5870,7 @@
           <a:bodyPr wrap="square" lIns="0" tIns="0" rIns="0" bIns="0" rtlCol="0" anchor="ctr"/>
           <a:lstStyle/>
           <a:p>
-            <a:pPr indent="0" marL="0">
+            <a:pPr marL="0" indent="0">
               <a:buNone/>
             </a:pPr>
             <a:r>
@@ -6186,7 +5909,7 @@
           <a:bodyPr wrap="square" lIns="0" tIns="0" rIns="0" bIns="0" rtlCol="0" anchor="ctr"/>
           <a:lstStyle/>
           <a:p>
-            <a:pPr indent="0" marL="0">
+            <a:pPr marL="0" indent="0">
               <a:buNone/>
             </a:pPr>
             <a:r>
@@ -6230,7 +5953,7 @@
             <a:prstDash val="solid"/>
           </a:ln>
           <a:effectLst>
-            <a:outerShdw sx="100000" sy="100000" kx="0" ky="0" algn="bl" rotWithShape="0" blurRad="114300" dist="50800" dir="5400000">
+            <a:outerShdw blurRad="114300" dist="50800" dir="5400000" algn="bl" rotWithShape="0">
               <a:srgbClr val="000000">
                 <a:alpha val="28000"/>
               </a:srgbClr>
@@ -6284,7 +6007,7 @@
           <a:bodyPr wrap="square" lIns="0" tIns="0" rIns="0" bIns="0" rtlCol="0" anchor="ctr"/>
           <a:lstStyle/>
           <a:p>
-            <a:pPr indent="0" marL="0">
+            <a:pPr marL="0" indent="0">
               <a:buNone/>
             </a:pPr>
             <a:r>
@@ -6323,7 +6046,7 @@
           <a:bodyPr wrap="square" lIns="0" tIns="0" rIns="0" bIns="0" rtlCol="0" anchor="ctr"/>
           <a:lstStyle/>
           <a:p>
-            <a:pPr indent="0" marL="0">
+            <a:pPr marL="0" indent="0">
               <a:buNone/>
             </a:pPr>
             <a:r>
@@ -6389,7 +6112,7 @@
           <a:bodyPr wrap="square" lIns="0" tIns="0" rIns="0" bIns="0" rtlCol="0" anchor="ctr"/>
           <a:lstStyle/>
           <a:p>
-            <a:pPr indent="0" marL="0">
+            <a:pPr marL="0" indent="0">
               <a:buNone/>
             </a:pPr>
             <a:r>
@@ -6428,11 +6151,11 @@
           <a:bodyPr wrap="square" lIns="0" tIns="0" rIns="0" bIns="0" rtlCol="0" anchor="ctr"/>
           <a:lstStyle/>
           <a:p>
-            <a:pPr indent="0" marL="0">
-              <a:buNone/>
-            </a:pPr>
-            <a:r>
-              <a:rPr lang="en-US" sz="1050" b="1" spc="200" kern="0" dirty="0">
+            <a:pPr marL="0" indent="0">
+              <a:buNone/>
+            </a:pPr>
+            <a:r>
+              <a:rPr lang="en-US" sz="1050" b="1" kern="0" spc="200" dirty="0">
                 <a:solidFill>
                   <a:srgbClr val="6B7BA8"/>
                 </a:solidFill>
@@ -6523,7 +6246,7 @@
           <a:bodyPr wrap="square" lIns="0" tIns="0" rIns="0" bIns="0" rtlCol="0" anchor="ctr"/>
           <a:lstStyle/>
           <a:p>
-            <a:pPr algn="ctr" indent="0" marL="0">
+            <a:pPr marL="0" indent="0" algn="ctr">
               <a:buNone/>
             </a:pPr>
             <a:r>
@@ -6562,7 +6285,7 @@
           <a:bodyPr wrap="square" lIns="0" tIns="0" rIns="0" bIns="0" rtlCol="0" anchor="ctr"/>
           <a:lstStyle/>
           <a:p>
-            <a:pPr indent="0" marL="0">
+            <a:pPr marL="0" indent="0">
               <a:buNone/>
             </a:pPr>
             <a:r>
@@ -6657,7 +6380,7 @@
           <a:bodyPr wrap="square" lIns="0" tIns="0" rIns="0" bIns="0" rtlCol="0" anchor="ctr"/>
           <a:lstStyle/>
           <a:p>
-            <a:pPr algn="ctr" indent="0" marL="0">
+            <a:pPr marL="0" indent="0" algn="ctr">
               <a:buNone/>
             </a:pPr>
             <a:r>
@@ -6696,7 +6419,7 @@
           <a:bodyPr wrap="square" lIns="0" tIns="0" rIns="0" bIns="0" rtlCol="0" anchor="ctr"/>
           <a:lstStyle/>
           <a:p>
-            <a:pPr indent="0" marL="0">
+            <a:pPr marL="0" indent="0">
               <a:buNone/>
             </a:pPr>
             <a:r>
@@ -6791,7 +6514,7 @@
           <a:bodyPr wrap="square" lIns="0" tIns="0" rIns="0" bIns="0" rtlCol="0" anchor="ctr"/>
           <a:lstStyle/>
           <a:p>
-            <a:pPr algn="ctr" indent="0" marL="0">
+            <a:pPr marL="0" indent="0" algn="ctr">
               <a:buNone/>
             </a:pPr>
             <a:r>
@@ -6830,7 +6553,7 @@
           <a:bodyPr wrap="square" lIns="0" tIns="0" rIns="0" bIns="0" rtlCol="0" anchor="ctr"/>
           <a:lstStyle/>
           <a:p>
-            <a:pPr indent="0" marL="0">
+            <a:pPr marL="0" indent="0">
               <a:buNone/>
             </a:pPr>
             <a:r>
@@ -6925,7 +6648,7 @@
           <a:bodyPr wrap="square" lIns="0" tIns="0" rIns="0" bIns="0" rtlCol="0" anchor="ctr"/>
           <a:lstStyle/>
           <a:p>
-            <a:pPr algn="ctr" indent="0" marL="0">
+            <a:pPr marL="0" indent="0" algn="ctr">
               <a:buNone/>
             </a:pPr>
             <a:r>
@@ -6964,7 +6687,7 @@
           <a:bodyPr wrap="square" lIns="0" tIns="0" rIns="0" bIns="0" rtlCol="0" anchor="ctr"/>
           <a:lstStyle/>
           <a:p>
-            <a:pPr indent="0" marL="0">
+            <a:pPr marL="0" indent="0">
               <a:buNone/>
             </a:pPr>
             <a:r>
@@ -7059,7 +6782,7 @@
           <a:bodyPr wrap="square" lIns="0" tIns="0" rIns="0" bIns="0" rtlCol="0" anchor="ctr"/>
           <a:lstStyle/>
           <a:p>
-            <a:pPr algn="ctr" indent="0" marL="0">
+            <a:pPr marL="0" indent="0" algn="ctr">
               <a:buNone/>
             </a:pPr>
             <a:r>
@@ -7098,7 +6821,7 @@
           <a:bodyPr wrap="square" lIns="0" tIns="0" rIns="0" bIns="0" rtlCol="0" anchor="ctr"/>
           <a:lstStyle/>
           <a:p>
-            <a:pPr indent="0" marL="0">
+            <a:pPr marL="0" indent="0">
               <a:buNone/>
             </a:pPr>
             <a:r>
@@ -7137,7 +6860,7 @@
           <a:bodyPr wrap="square" lIns="0" tIns="0" rIns="0" bIns="0" rtlCol="0" anchor="ctr"/>
           <a:lstStyle/>
           <a:p>
-            <a:pPr indent="0" marL="0">
+            <a:pPr marL="0" indent="0">
               <a:buNone/>
             </a:pPr>
             <a:r>
@@ -7171,6 +6894,7 @@
         <a:solidFill>
           <a:srgbClr val="0C1330"/>
         </a:solidFill>
+        <a:effectLst/>
       </p:bgPr>
     </p:bg>
     <p:spTree>
@@ -7235,11 +6959,11 @@
           <a:bodyPr wrap="square" lIns="0" tIns="0" rIns="0" bIns="0" rtlCol="0" anchor="ctr"/>
           <a:lstStyle/>
           <a:p>
-            <a:pPr indent="0" marL="0">
-              <a:buNone/>
-            </a:pPr>
-            <a:r>
-              <a:rPr lang="en-US" sz="1100" b="1" spc="300" kern="0" dirty="0">
+            <a:pPr marL="0" indent="0">
+              <a:buNone/>
+            </a:pPr>
+            <a:r>
+              <a:rPr lang="en-US" sz="1100" b="1" kern="0" spc="300" dirty="0">
                 <a:solidFill>
                   <a:srgbClr val="22D3EE"/>
                 </a:solidFill>
@@ -7274,7 +6998,7 @@
           <a:bodyPr wrap="square" lIns="0" tIns="0" rIns="0" bIns="0" rtlCol="0" anchor="ctr"/>
           <a:lstStyle/>
           <a:p>
-            <a:pPr indent="0" marL="0">
+            <a:pPr marL="0" indent="0">
               <a:buNone/>
             </a:pPr>
             <a:r>
@@ -7313,7 +7037,7 @@
           <a:bodyPr wrap="square" lIns="0" tIns="0" rIns="0" bIns="0" rtlCol="0" anchor="ctr"/>
           <a:lstStyle/>
           <a:p>
-            <a:pPr indent="0" marL="0">
+            <a:pPr marL="0" indent="0">
               <a:buNone/>
             </a:pPr>
             <a:r>
@@ -7379,7 +7103,7 @@
           <a:bodyPr wrap="square" lIns="0" tIns="0" rIns="0" bIns="0" rtlCol="0" anchor="ctr"/>
           <a:lstStyle/>
           <a:p>
-            <a:pPr algn="ctr" indent="0" marL="0">
+            <a:pPr marL="0" indent="0" algn="ctr">
               <a:buNone/>
             </a:pPr>
             <a:r>
@@ -7418,7 +7142,7 @@
           <a:bodyPr wrap="square" lIns="0" tIns="0" rIns="0" bIns="0" rtlCol="0" anchor="ctr"/>
           <a:lstStyle/>
           <a:p>
-            <a:pPr algn="ctr" indent="0" marL="0">
+            <a:pPr marL="0" indent="0" algn="ctr">
               <a:buNone/>
             </a:pPr>
             <a:r>
@@ -7457,7 +7181,7 @@
           <a:bodyPr wrap="square" lIns="0" tIns="0" rIns="0" bIns="0" rtlCol="0" anchor="ctr"/>
           <a:lstStyle/>
           <a:p>
-            <a:pPr algn="ctr" indent="0" marL="0">
+            <a:pPr marL="0" indent="0" algn="ctr">
               <a:buNone/>
             </a:pPr>
             <a:r>
@@ -7523,7 +7247,7 @@
           <a:bodyPr wrap="square" lIns="0" tIns="0" rIns="0" bIns="0" rtlCol="0" anchor="ctr"/>
           <a:lstStyle/>
           <a:p>
-            <a:pPr algn="ctr" indent="0" marL="0">
+            <a:pPr marL="0" indent="0" algn="ctr">
               <a:buNone/>
             </a:pPr>
             <a:r>
@@ -7562,7 +7286,7 @@
           <a:bodyPr wrap="square" lIns="0" tIns="0" rIns="0" bIns="0" rtlCol="0" anchor="ctr"/>
           <a:lstStyle/>
           <a:p>
-            <a:pPr algn="ctr" indent="0" marL="0">
+            <a:pPr marL="0" indent="0" algn="ctr">
               <a:buNone/>
             </a:pPr>
             <a:r>
@@ -7601,7 +7325,7 @@
           <a:bodyPr wrap="square" lIns="0" tIns="0" rIns="0" bIns="0" rtlCol="0" anchor="ctr"/>
           <a:lstStyle/>
           <a:p>
-            <a:pPr algn="ctr" indent="0" marL="0">
+            <a:pPr marL="0" indent="0" algn="ctr">
               <a:buNone/>
             </a:pPr>
             <a:r>
@@ -7667,7 +7391,7 @@
           <a:bodyPr wrap="square" lIns="0" tIns="0" rIns="0" bIns="0" rtlCol="0" anchor="ctr"/>
           <a:lstStyle/>
           <a:p>
-            <a:pPr algn="ctr" indent="0" marL="0">
+            <a:pPr marL="0" indent="0" algn="ctr">
               <a:buNone/>
             </a:pPr>
             <a:r>
@@ -7706,7 +7430,7 @@
           <a:bodyPr wrap="square" lIns="0" tIns="0" rIns="0" bIns="0" rtlCol="0" anchor="ctr"/>
           <a:lstStyle/>
           <a:p>
-            <a:pPr algn="ctr" indent="0" marL="0">
+            <a:pPr marL="0" indent="0" algn="ctr">
               <a:buNone/>
             </a:pPr>
             <a:r>
@@ -7745,7 +7469,7 @@
           <a:bodyPr wrap="square" lIns="0" tIns="0" rIns="0" bIns="0" rtlCol="0" anchor="ctr"/>
           <a:lstStyle/>
           <a:p>
-            <a:pPr algn="ctr" indent="0" marL="0">
+            <a:pPr marL="0" indent="0" algn="ctr">
               <a:buNone/>
             </a:pPr>
             <a:r>
@@ -7811,7 +7535,7 @@
           <a:bodyPr wrap="square" lIns="0" tIns="0" rIns="0" bIns="0" rtlCol="0" anchor="ctr"/>
           <a:lstStyle/>
           <a:p>
-            <a:pPr algn="ctr" indent="0" marL="0">
+            <a:pPr marL="0" indent="0" algn="ctr">
               <a:buNone/>
             </a:pPr>
             <a:r>
@@ -7850,7 +7574,7 @@
           <a:bodyPr wrap="square" lIns="0" tIns="0" rIns="0" bIns="0" rtlCol="0" anchor="ctr"/>
           <a:lstStyle/>
           <a:p>
-            <a:pPr algn="ctr" indent="0" marL="0">
+            <a:pPr marL="0" indent="0" algn="ctr">
               <a:buNone/>
             </a:pPr>
             <a:r>
@@ -7889,7 +7613,7 @@
           <a:bodyPr wrap="square" lIns="0" tIns="0" rIns="0" bIns="0" rtlCol="0" anchor="ctr"/>
           <a:lstStyle/>
           <a:p>
-            <a:pPr algn="ctr" indent="0" marL="0">
+            <a:pPr marL="0" indent="0" algn="ctr">
               <a:buNone/>
             </a:pPr>
             <a:r>
@@ -7955,7 +7679,7 @@
           <a:bodyPr wrap="square" lIns="0" tIns="0" rIns="0" bIns="0" rtlCol="0" anchor="ctr"/>
           <a:lstStyle/>
           <a:p>
-            <a:pPr algn="ctr" indent="0" marL="0">
+            <a:pPr marL="0" indent="0" algn="ctr">
               <a:buNone/>
             </a:pPr>
             <a:r>
@@ -7994,7 +7718,7 @@
           <a:bodyPr wrap="square" lIns="0" tIns="0" rIns="0" bIns="0" rtlCol="0" anchor="ctr"/>
           <a:lstStyle/>
           <a:p>
-            <a:pPr algn="ctr" indent="0" marL="0">
+            <a:pPr marL="0" indent="0" algn="ctr">
               <a:buNone/>
             </a:pPr>
             <a:r>
@@ -8033,7 +7757,7 @@
           <a:bodyPr wrap="square" lIns="0" tIns="0" rIns="0" bIns="0" rtlCol="0" anchor="ctr"/>
           <a:lstStyle/>
           <a:p>
-            <a:pPr algn="ctr" indent="0" marL="0">
+            <a:pPr marL="0" indent="0" algn="ctr">
               <a:buNone/>
             </a:pPr>
             <a:r>
@@ -8099,7 +7823,7 @@
           <a:bodyPr wrap="square" lIns="0" tIns="0" rIns="0" bIns="0" rtlCol="0" anchor="ctr"/>
           <a:lstStyle/>
           <a:p>
-            <a:pPr algn="ctr" indent="0" marL="0">
+            <a:pPr marL="0" indent="0" algn="ctr">
               <a:buNone/>
             </a:pPr>
             <a:r>
@@ -8138,7 +7862,7 @@
           <a:bodyPr wrap="square" lIns="0" tIns="0" rIns="0" bIns="0" rtlCol="0" anchor="ctr"/>
           <a:lstStyle/>
           <a:p>
-            <a:pPr algn="ctr" indent="0" marL="0">
+            <a:pPr marL="0" indent="0" algn="ctr">
               <a:buNone/>
             </a:pPr>
             <a:r>
@@ -8206,7 +7930,7 @@
           <a:bodyPr wrap="square" lIns="0" tIns="0" rIns="0" bIns="0" rtlCol="0" anchor="ctr"/>
           <a:lstStyle/>
           <a:p>
-            <a:pPr algn="ctr" indent="0" marL="0">
+            <a:pPr marL="0" indent="0" algn="ctr">
               <a:buNone/>
             </a:pPr>
             <a:r>
@@ -8270,7 +7994,7 @@
           <a:bodyPr wrap="square" lIns="0" tIns="0" rIns="0" bIns="0" rtlCol="0" anchor="ctr"/>
           <a:lstStyle/>
           <a:p>
-            <a:pPr algn="ctr" indent="0" marL="0">
+            <a:pPr marL="0" indent="0" algn="ctr">
               <a:buNone/>
             </a:pPr>
             <a:r>
@@ -8309,11 +8033,11 @@
           <a:bodyPr wrap="square" lIns="0" tIns="0" rIns="0" bIns="0" rtlCol="0" anchor="ctr"/>
           <a:lstStyle/>
           <a:p>
-            <a:pPr indent="0" marL="0">
-              <a:buNone/>
-            </a:pPr>
-            <a:r>
-              <a:rPr lang="en-US" sz="1100" b="1" spc="200" kern="0" dirty="0">
+            <a:pPr marL="0" indent="0">
+              <a:buNone/>
+            </a:pPr>
+            <a:r>
+              <a:rPr lang="en-US" sz="1100" b="1" kern="0" spc="200" dirty="0">
                 <a:solidFill>
                   <a:srgbClr val="6B7BA8"/>
                 </a:solidFill>
@@ -8375,7 +8099,7 @@
           <a:bodyPr wrap="square" lIns="0" tIns="0" rIns="0" bIns="0" rtlCol="0" anchor="ctr"/>
           <a:lstStyle/>
           <a:p>
-            <a:pPr algn="ctr" indent="0" marL="0">
+            <a:pPr marL="0" indent="0" algn="ctr">
               <a:buNone/>
             </a:pPr>
             <a:r>
@@ -8441,7 +8165,7 @@
           <a:bodyPr wrap="square" lIns="0" tIns="0" rIns="0" bIns="0" rtlCol="0" anchor="ctr"/>
           <a:lstStyle/>
           <a:p>
-            <a:pPr algn="ctr" indent="0" marL="0">
+            <a:pPr marL="0" indent="0" algn="ctr">
               <a:buNone/>
             </a:pPr>
             <a:r>
@@ -8507,7 +8231,7 @@
           <a:bodyPr wrap="square" lIns="0" tIns="0" rIns="0" bIns="0" rtlCol="0" anchor="ctr"/>
           <a:lstStyle/>
           <a:p>
-            <a:pPr algn="ctr" indent="0" marL="0">
+            <a:pPr marL="0" indent="0" algn="ctr">
               <a:buNone/>
             </a:pPr>
             <a:r>
@@ -8573,7 +8297,7 @@
           <a:bodyPr wrap="square" lIns="0" tIns="0" rIns="0" bIns="0" rtlCol="0" anchor="ctr"/>
           <a:lstStyle/>
           <a:p>
-            <a:pPr algn="ctr" indent="0" marL="0">
+            <a:pPr marL="0" indent="0" algn="ctr">
               <a:buNone/>
             </a:pPr>
             <a:r>
@@ -8639,7 +8363,7 @@
           <a:bodyPr wrap="square" lIns="0" tIns="0" rIns="0" bIns="0" rtlCol="0" anchor="ctr"/>
           <a:lstStyle/>
           <a:p>
-            <a:pPr algn="ctr" indent="0" marL="0">
+            <a:pPr marL="0" indent="0" algn="ctr">
               <a:buNone/>
             </a:pPr>
             <a:r>
@@ -8705,7 +8429,7 @@
           <a:bodyPr wrap="square" lIns="0" tIns="0" rIns="0" bIns="0" rtlCol="0" anchor="ctr"/>
           <a:lstStyle/>
           <a:p>
-            <a:pPr algn="ctr" indent="0" marL="0">
+            <a:pPr marL="0" indent="0" algn="ctr">
               <a:buNone/>
             </a:pPr>
             <a:r>
@@ -8771,7 +8495,7 @@
           <a:bodyPr wrap="square" lIns="0" tIns="0" rIns="0" bIns="0" rtlCol="0" anchor="ctr"/>
           <a:lstStyle/>
           <a:p>
-            <a:pPr algn="ctr" indent="0" marL="0">
+            <a:pPr marL="0" indent="0" algn="ctr">
               <a:buNone/>
             </a:pPr>
             <a:r>
@@ -8837,7 +8561,7 @@
           <a:bodyPr wrap="square" lIns="0" tIns="0" rIns="0" bIns="0" rtlCol="0" anchor="ctr"/>
           <a:lstStyle/>
           <a:p>
-            <a:pPr algn="ctr" indent="0" marL="0">
+            <a:pPr marL="0" indent="0" algn="ctr">
               <a:buNone/>
             </a:pPr>
             <a:r>
@@ -8871,6 +8595,7 @@
         <a:solidFill>
           <a:srgbClr val="080D20"/>
         </a:solidFill>
+        <a:effectLst/>
       </p:bgPr>
     </p:bg>
     <p:spTree>
@@ -8908,11 +8633,11 @@
           <a:bodyPr wrap="square" lIns="0" tIns="0" rIns="0" bIns="0" rtlCol="0" anchor="ctr"/>
           <a:lstStyle/>
           <a:p>
-            <a:pPr indent="0" marL="0">
-              <a:buNone/>
-            </a:pPr>
-            <a:r>
-              <a:rPr lang="en-US" sz="1100" b="1" spc="300" kern="0" dirty="0">
+            <a:pPr marL="0" indent="0">
+              <a:buNone/>
+            </a:pPr>
+            <a:r>
+              <a:rPr lang="en-US" sz="1100" b="1" kern="0" spc="300" dirty="0">
                 <a:solidFill>
                   <a:srgbClr val="22D3EE"/>
                 </a:solidFill>
@@ -8947,7 +8672,7 @@
           <a:bodyPr wrap="square" lIns="0" tIns="0" rIns="0" bIns="0" rtlCol="0" anchor="ctr"/>
           <a:lstStyle/>
           <a:p>
-            <a:pPr indent="0" marL="0">
+            <a:pPr marL="0" indent="0">
               <a:buNone/>
             </a:pPr>
             <a:r>
@@ -8967,15 +8692,15 @@
       </p:sp>
       <p:pic>
         <p:nvPicPr>
-          <p:cNvPr id="4" name="Image 0" descr="/home/claude/arch.png">    </p:cNvPr>
+          <p:cNvPr id="4" name="Image 0" descr="/home/claude/arch.png"/>
           <p:cNvPicPr>
             <a:picLocks noChangeAspect="1"/>
           </p:cNvPicPr>
           <p:nvPr/>
         </p:nvPicPr>
         <p:blipFill>
-          <a:blip r:embed="rId1"/>
-          <a:srcRect l="-56417" r="-56417" t="0" b="0"/>
+          <a:blip r:embed="rId3"/>
+          <a:srcRect l="-56417" r="-56417"/>
           <a:stretch/>
         </p:blipFill>
         <p:spPr>
@@ -9004,6 +8729,7 @@
         <a:solidFill>
           <a:srgbClr val="0C1330"/>
         </a:solidFill>
+        <a:effectLst/>
       </p:bgPr>
     </p:bg>
     <p:spTree>
@@ -9068,11 +8794,11 @@
           <a:bodyPr wrap="square" lIns="0" tIns="0" rIns="0" bIns="0" rtlCol="0" anchor="ctr"/>
           <a:lstStyle/>
           <a:p>
-            <a:pPr indent="0" marL="0">
-              <a:buNone/>
-            </a:pPr>
-            <a:r>
-              <a:rPr lang="en-US" sz="1100" b="1" spc="300" kern="0" dirty="0">
+            <a:pPr marL="0" indent="0">
+              <a:buNone/>
+            </a:pPr>
+            <a:r>
+              <a:rPr lang="en-US" sz="1100" b="1" kern="0" spc="300" dirty="0">
                 <a:solidFill>
                   <a:srgbClr val="22D3EE"/>
                 </a:solidFill>
@@ -9107,7 +8833,7 @@
           <a:bodyPr wrap="square" lIns="0" tIns="0" rIns="0" bIns="0" rtlCol="0" anchor="ctr"/>
           <a:lstStyle/>
           <a:p>
-            <a:pPr indent="0" marL="0">
+            <a:pPr marL="0" indent="0">
               <a:buNone/>
             </a:pPr>
             <a:r>
@@ -9146,7 +8872,7 @@
           <a:bodyPr wrap="square" lIns="0" tIns="0" rIns="0" bIns="0" rtlCol="0" anchor="t"/>
           <a:lstStyle/>
           <a:p>
-            <a:pPr indent="0" marL="0">
+            <a:pPr marL="0" indent="0">
               <a:lnSpc>
                 <a:spcPct val="115000"/>
               </a:lnSpc>
@@ -9217,7 +8943,7 @@
           <a:bodyPr wrap="square" lIns="0" tIns="0" rIns="0" bIns="0" rtlCol="0" anchor="ctr"/>
           <a:lstStyle/>
           <a:p>
-            <a:pPr indent="0" marL="0">
+            <a:pPr marL="0" indent="0">
               <a:buNone/>
             </a:pPr>
             <a:r>
@@ -9231,9 +8957,6 @@
               </a:rPr>
               <a:t>Live scan — </a:t>
             </a:r>
-            <a:pPr indent="0" marL="0">
-              <a:buNone/>
-            </a:pPr>
             <a:r>
               <a:rPr lang="en-US" sz="1300" dirty="0">
                 <a:solidFill>
@@ -9299,7 +9022,7 @@
           <a:bodyPr wrap="square" lIns="0" tIns="0" rIns="0" bIns="0" rtlCol="0" anchor="ctr"/>
           <a:lstStyle/>
           <a:p>
-            <a:pPr indent="0" marL="0">
+            <a:pPr marL="0" indent="0">
               <a:buNone/>
             </a:pPr>
             <a:r>
@@ -9313,9 +9036,6 @@
               </a:rPr>
               <a:t>Simulated call — </a:t>
             </a:r>
-            <a:pPr indent="0" marL="0">
-              <a:buNone/>
-            </a:pPr>
             <a:r>
               <a:rPr lang="en-US" sz="1300" dirty="0">
                 <a:solidFill>
@@ -9381,7 +9101,7 @@
           <a:bodyPr wrap="square" lIns="0" tIns="0" rIns="0" bIns="0" rtlCol="0" anchor="ctr"/>
           <a:lstStyle/>
           <a:p>
-            <a:pPr indent="0" marL="0">
+            <a:pPr marL="0" indent="0">
               <a:buNone/>
             </a:pPr>
             <a:r>
@@ -9395,9 +9115,6 @@
               </a:rPr>
               <a:t>Intervention — </a:t>
             </a:r>
-            <a:pPr indent="0" marL="0">
-              <a:buNone/>
-            </a:pPr>
             <a:r>
               <a:rPr lang="en-US" sz="1300" dirty="0">
                 <a:solidFill>
@@ -9463,7 +9180,7 @@
           <a:bodyPr wrap="square" lIns="0" tIns="0" rIns="0" bIns="0" rtlCol="0" anchor="ctr"/>
           <a:lstStyle/>
           <a:p>
-            <a:pPr indent="0" marL="0">
+            <a:pPr marL="0" indent="0">
               <a:buNone/>
             </a:pPr>
             <a:r>
@@ -9477,9 +9194,6 @@
               </a:rPr>
               <a:t>On-device — </a:t>
             </a:r>
-            <a:pPr indent="0" marL="0">
-              <a:buNone/>
-            </a:pPr>
             <a:r>
               <a:rPr lang="en-US" sz="1300" dirty="0">
                 <a:solidFill>
@@ -9521,7 +9235,7 @@
             <a:prstDash val="solid"/>
           </a:ln>
           <a:effectLst>
-            <a:outerShdw sx="100000" sy="100000" kx="0" ky="0" algn="bl" rotWithShape="0" blurRad="203200" dist="76200" dir="5400000">
+            <a:outerShdw blurRad="203200" dist="76200" dir="5400000" algn="bl" rotWithShape="0">
               <a:srgbClr val="000000">
                 <a:alpha val="50000"/>
               </a:srgbClr>
@@ -9577,7 +9291,7 @@
           <a:bodyPr wrap="square" lIns="0" tIns="0" rIns="0" bIns="0" rtlCol="0" anchor="ctr"/>
           <a:lstStyle/>
           <a:p>
-            <a:pPr indent="0" marL="0">
+            <a:pPr marL="0" indent="0">
               <a:buNone/>
             </a:pPr>
             <a:r>
@@ -9591,9 +9305,6 @@
               </a:rPr>
               <a:t>Fraud</a:t>
             </a:r>
-            <a:pPr indent="0" marL="0">
-              <a:buNone/>
-            </a:pPr>
             <a:r>
               <a:rPr lang="en-US" sz="1400" b="1" dirty="0">
                 <a:solidFill>
@@ -9630,11 +9341,11 @@
           <a:bodyPr wrap="square" lIns="0" tIns="0" rIns="0" bIns="0" rtlCol="0" anchor="ctr"/>
           <a:lstStyle/>
           <a:p>
-            <a:pPr indent="0" marL="0">
-              <a:buNone/>
-            </a:pPr>
-            <a:r>
-              <a:rPr lang="en-US" sz="850" b="1" spc="200" kern="0" dirty="0">
+            <a:pPr marL="0" indent="0">
+              <a:buNone/>
+            </a:pPr>
+            <a:r>
+              <a:rPr lang="en-US" sz="850" b="1" kern="0" spc="200" dirty="0">
                 <a:solidFill>
                   <a:srgbClr val="6B7BA8"/>
                 </a:solidFill>
@@ -9696,7 +9407,7 @@
           <a:bodyPr wrap="square" lIns="0" tIns="0" rIns="0" bIns="0" rtlCol="0" anchor="t"/>
           <a:lstStyle/>
           <a:p>
-            <a:pPr indent="0" marL="0">
+            <a:pPr marL="0" indent="0">
               <a:buNone/>
             </a:pPr>
             <a:r>
@@ -9762,7 +9473,7 @@
           <a:bodyPr wrap="square" lIns="0" tIns="0" rIns="0" bIns="0" rtlCol="0" anchor="ctr"/>
           <a:lstStyle/>
           <a:p>
-            <a:pPr indent="0" marL="0">
+            <a:pPr marL="0" indent="0">
               <a:buNone/>
             </a:pPr>
             <a:r>
@@ -9801,7 +9512,7 @@
           <a:bodyPr wrap="square" lIns="0" tIns="0" rIns="0" bIns="0" rtlCol="0" anchor="ctr"/>
           <a:lstStyle/>
           <a:p>
-            <a:pPr indent="0" marL="0">
+            <a:pPr marL="0" indent="0">
               <a:buNone/>
             </a:pPr>
             <a:r>
@@ -9867,7 +9578,7 @@
           <a:bodyPr wrap="square" lIns="0" tIns="0" rIns="0" bIns="0" rtlCol="0" anchor="ctr"/>
           <a:lstStyle/>
           <a:p>
-            <a:pPr algn="ctr" indent="0" marL="0">
+            <a:pPr marL="0" indent="0" algn="ctr">
               <a:buNone/>
             </a:pPr>
             <a:r>
@@ -9933,7 +9644,7 @@
           <a:bodyPr wrap="square" lIns="0" tIns="0" rIns="0" bIns="0" rtlCol="0" anchor="ctr"/>
           <a:lstStyle/>
           <a:p>
-            <a:pPr algn="ctr" indent="0" marL="0">
+            <a:pPr marL="0" indent="0" algn="ctr">
               <a:buNone/>
             </a:pPr>
             <a:r>
@@ -9999,7 +9710,7 @@
           <a:bodyPr wrap="square" lIns="0" tIns="0" rIns="0" bIns="0" rtlCol="0" anchor="ctr"/>
           <a:lstStyle/>
           <a:p>
-            <a:pPr algn="ctr" indent="0" marL="0">
+            <a:pPr marL="0" indent="0" algn="ctr">
               <a:buNone/>
             </a:pPr>
             <a:r>
@@ -10038,7 +9749,7 @@
           <a:bodyPr wrap="square" lIns="0" tIns="0" rIns="0" bIns="0" rtlCol="0" anchor="t"/>
           <a:lstStyle/>
           <a:p>
-            <a:pPr indent="0" marL="0">
+            <a:pPr marL="0" indent="0">
               <a:lnSpc>
                 <a:spcPct val="110000"/>
               </a:lnSpc>
@@ -10102,7 +9813,7 @@
           <a:bodyPr wrap="square" lIns="0" tIns="0" rIns="0" bIns="0" rtlCol="0" anchor="ctr"/>
           <a:lstStyle/>
           <a:p>
-            <a:pPr algn="ctr" indent="0" marL="0">
+            <a:pPr marL="0" indent="0" algn="ctr">
               <a:buNone/>
             </a:pPr>
             <a:r>
@@ -10168,7 +9879,7 @@
           <a:bodyPr wrap="square" lIns="0" tIns="0" rIns="0" bIns="0" rtlCol="0" anchor="ctr"/>
           <a:lstStyle/>
           <a:p>
-            <a:pPr algn="ctr" indent="0" marL="0">
+            <a:pPr marL="0" indent="0" algn="ctr">
               <a:buNone/>
             </a:pPr>
             <a:r>
@@ -10202,6 +9913,7 @@
         <a:solidFill>
           <a:srgbClr val="0C1330"/>
         </a:solidFill>
+        <a:effectLst/>
       </p:bgPr>
     </p:bg>
     <p:spTree>
@@ -10239,11 +9951,11 @@
           <a:bodyPr wrap="square" lIns="0" tIns="0" rIns="0" bIns="0" rtlCol="0" anchor="ctr"/>
           <a:lstStyle/>
           <a:p>
-            <a:pPr indent="0" marL="0">
-              <a:buNone/>
-            </a:pPr>
-            <a:r>
-              <a:rPr lang="en-US" sz="1100" b="1" spc="300" kern="0" dirty="0">
+            <a:pPr marL="0" indent="0">
+              <a:buNone/>
+            </a:pPr>
+            <a:r>
+              <a:rPr lang="en-US" sz="1100" b="1" kern="0" spc="300" dirty="0">
                 <a:solidFill>
                   <a:srgbClr val="0B1436"/>
                 </a:solidFill>
@@ -10278,7 +9990,7 @@
           <a:bodyPr wrap="square" lIns="0" tIns="0" rIns="0" bIns="0" rtlCol="0" anchor="ctr"/>
           <a:lstStyle/>
           <a:p>
-            <a:pPr indent="0" marL="0">
+            <a:pPr marL="0" indent="0">
               <a:buNone/>
             </a:pPr>
             <a:r>
@@ -10369,7 +10081,7 @@
           <a:bodyPr wrap="square" lIns="0" tIns="0" rIns="0" bIns="0" rtlCol="0" anchor="ctr"/>
           <a:lstStyle/>
           <a:p>
-            <a:pPr indent="0" marL="0">
+            <a:pPr marL="0" indent="0">
               <a:buNone/>
             </a:pPr>
             <a:r>
@@ -10408,7 +10120,7 @@
           <a:bodyPr wrap="square" lIns="0" tIns="0" rIns="0" bIns="0" rtlCol="0" anchor="ctr"/>
           <a:lstStyle/>
           <a:p>
-            <a:pPr indent="0" marL="0">
+            <a:pPr marL="0" indent="0">
               <a:buNone/>
             </a:pPr>
             <a:r>
@@ -10447,7 +10159,7 @@
           <a:bodyPr wrap="square" lIns="0" tIns="0" rIns="0" bIns="0" rtlCol="0" anchor="ctr"/>
           <a:lstStyle/>
           <a:p>
-            <a:pPr indent="0" marL="0">
+            <a:pPr marL="0" indent="0">
               <a:buNone/>
             </a:pPr>
             <a:r>
@@ -10538,7 +10250,7 @@
           <a:bodyPr wrap="square" lIns="0" tIns="0" rIns="0" bIns="0" rtlCol="0" anchor="ctr"/>
           <a:lstStyle/>
           <a:p>
-            <a:pPr indent="0" marL="0">
+            <a:pPr marL="0" indent="0">
               <a:buNone/>
             </a:pPr>
             <a:r>
@@ -10577,7 +10289,7 @@
           <a:bodyPr wrap="square" lIns="0" tIns="0" rIns="0" bIns="0" rtlCol="0" anchor="ctr"/>
           <a:lstStyle/>
           <a:p>
-            <a:pPr indent="0" marL="0">
+            <a:pPr marL="0" indent="0">
               <a:buNone/>
             </a:pPr>
             <a:r>
@@ -10616,7 +10328,7 @@
           <a:bodyPr wrap="square" lIns="0" tIns="0" rIns="0" bIns="0" rtlCol="0" anchor="ctr"/>
           <a:lstStyle/>
           <a:p>
-            <a:pPr indent="0" marL="0">
+            <a:pPr marL="0" indent="0">
               <a:buNone/>
             </a:pPr>
             <a:r>
@@ -10707,7 +10419,7 @@
           <a:bodyPr wrap="square" lIns="0" tIns="0" rIns="0" bIns="0" rtlCol="0" anchor="ctr"/>
           <a:lstStyle/>
           <a:p>
-            <a:pPr indent="0" marL="0">
+            <a:pPr marL="0" indent="0">
               <a:buNone/>
             </a:pPr>
             <a:r>
@@ -10746,7 +10458,7 @@
           <a:bodyPr wrap="square" lIns="0" tIns="0" rIns="0" bIns="0" rtlCol="0" anchor="ctr"/>
           <a:lstStyle/>
           <a:p>
-            <a:pPr indent="0" marL="0">
+            <a:pPr marL="0" indent="0">
               <a:buNone/>
             </a:pPr>
             <a:r>
@@ -10785,7 +10497,7 @@
           <a:bodyPr wrap="square" lIns="0" tIns="0" rIns="0" bIns="0" rtlCol="0" anchor="ctr"/>
           <a:lstStyle/>
           <a:p>
-            <a:pPr indent="0" marL="0">
+            <a:pPr marL="0" indent="0">
               <a:buNone/>
             </a:pPr>
             <a:r>
@@ -10876,7 +10588,7 @@
           <a:bodyPr wrap="square" lIns="0" tIns="0" rIns="0" bIns="0" rtlCol="0" anchor="ctr"/>
           <a:lstStyle/>
           <a:p>
-            <a:pPr indent="0" marL="0">
+            <a:pPr marL="0" indent="0">
               <a:buNone/>
             </a:pPr>
             <a:r>
@@ -10915,7 +10627,7 @@
           <a:bodyPr wrap="square" lIns="0" tIns="0" rIns="0" bIns="0" rtlCol="0" anchor="ctr"/>
           <a:lstStyle/>
           <a:p>
-            <a:pPr indent="0" marL="0">
+            <a:pPr marL="0" indent="0">
               <a:buNone/>
             </a:pPr>
             <a:r>
@@ -10954,7 +10666,7 @@
           <a:bodyPr wrap="square" lIns="0" tIns="0" rIns="0" bIns="0" rtlCol="0" anchor="ctr"/>
           <a:lstStyle/>
           <a:p>
-            <a:pPr indent="0" marL="0">
+            <a:pPr marL="0" indent="0">
               <a:buNone/>
             </a:pPr>
             <a:r>
@@ -10993,11 +10705,11 @@
           <a:bodyPr wrap="square" lIns="0" tIns="0" rIns="0" bIns="0" rtlCol="0" anchor="ctr"/>
           <a:lstStyle/>
           <a:p>
-            <a:pPr indent="0" marL="0">
-              <a:buNone/>
-            </a:pPr>
-            <a:r>
-              <a:rPr lang="en-US" sz="1050" b="1" spc="200" kern="0" dirty="0">
+            <a:pPr marL="0" indent="0">
+              <a:buNone/>
+            </a:pPr>
+            <a:r>
+              <a:rPr lang="en-US" sz="1050" b="1" kern="0" spc="200" dirty="0">
                 <a:solidFill>
                   <a:srgbClr val="9BAAD4"/>
                 </a:solidFill>
@@ -11032,7 +10744,7 @@
           <a:bodyPr wrap="square" lIns="0" tIns="0" rIns="0" bIns="0" rtlCol="0" anchor="ctr"/>
           <a:lstStyle/>
           <a:p>
-            <a:pPr indent="0" marL="0">
+            <a:pPr marL="0" indent="0">
               <a:buNone/>
             </a:pPr>
             <a:r>
@@ -11093,7 +10805,7 @@
           <a:bodyPr wrap="square" lIns="0" tIns="0" rIns="0" bIns="0" rtlCol="0" anchor="ctr"/>
           <a:lstStyle/>
           <a:p>
-            <a:pPr indent="0" marL="0">
+            <a:pPr marL="0" indent="0">
               <a:buNone/>
             </a:pPr>
             <a:r>
@@ -11154,7 +10866,7 @@
           <a:bodyPr wrap="square" lIns="0" tIns="0" rIns="0" bIns="0" rtlCol="0" anchor="ctr"/>
           <a:lstStyle/>
           <a:p>
-            <a:pPr indent="0" marL="0">
+            <a:pPr marL="0" indent="0">
               <a:buNone/>
             </a:pPr>
             <a:r>
@@ -11193,7 +10905,7 @@
           <a:bodyPr wrap="square" lIns="0" tIns="0" rIns="0" bIns="0" rtlCol="0" anchor="ctr"/>
           <a:lstStyle/>
           <a:p>
-            <a:pPr indent="0" marL="0">
+            <a:pPr marL="0" indent="0">
               <a:buNone/>
             </a:pPr>
             <a:r>
@@ -11254,7 +10966,7 @@
           <a:bodyPr wrap="square" lIns="0" tIns="0" rIns="0" bIns="0" rtlCol="0" anchor="ctr"/>
           <a:lstStyle/>
           <a:p>
-            <a:pPr indent="0" marL="0">
+            <a:pPr marL="0" indent="0">
               <a:buNone/>
             </a:pPr>
             <a:r>
@@ -11315,7 +11027,7 @@
           <a:bodyPr wrap="square" lIns="0" tIns="0" rIns="0" bIns="0" rtlCol="0" anchor="ctr"/>
           <a:lstStyle/>
           <a:p>
-            <a:pPr indent="0" marL="0">
+            <a:pPr marL="0" indent="0">
               <a:buNone/>
             </a:pPr>
             <a:r>
@@ -11376,7 +11088,7 @@
           <a:bodyPr wrap="square" lIns="0" tIns="0" rIns="0" bIns="0" rtlCol="0" anchor="ctr"/>
           <a:lstStyle/>
           <a:p>
-            <a:pPr indent="0" marL="0">
+            <a:pPr marL="0" indent="0">
               <a:buNone/>
             </a:pPr>
             <a:r>
@@ -11437,7 +11149,7 @@
           <a:bodyPr wrap="square" lIns="0" tIns="0" rIns="0" bIns="0" rtlCol="0" anchor="ctr"/>
           <a:lstStyle/>
           <a:p>
-            <a:pPr indent="0" marL="0">
+            <a:pPr marL="0" indent="0">
               <a:buNone/>
             </a:pPr>
             <a:r>
@@ -11476,7 +11188,7 @@
           <a:bodyPr wrap="square" lIns="0" tIns="0" rIns="0" bIns="0" rtlCol="0" anchor="t"/>
           <a:lstStyle/>
           <a:p>
-            <a:pPr indent="0" marL="0">
+            <a:pPr marL="0" indent="0">
               <a:lnSpc>
                 <a:spcPct val="108000"/>
               </a:lnSpc>
@@ -11513,6 +11225,7 @@
         <a:solidFill>
           <a:srgbClr val="0C1330"/>
         </a:solidFill>
+        <a:effectLst/>
       </p:bgPr>
     </p:bg>
     <p:spTree>
@@ -11577,11 +11290,11 @@
           <a:bodyPr wrap="square" lIns="0" tIns="0" rIns="0" bIns="0" rtlCol="0" anchor="ctr"/>
           <a:lstStyle/>
           <a:p>
-            <a:pPr indent="0" marL="0">
-              <a:buNone/>
-            </a:pPr>
-            <a:r>
-              <a:rPr lang="en-US" sz="1100" b="1" spc="300" kern="0" dirty="0">
+            <a:pPr marL="0" indent="0">
+              <a:buNone/>
+            </a:pPr>
+            <a:r>
+              <a:rPr lang="en-US" sz="1100" b="1" kern="0" spc="300" dirty="0">
                 <a:solidFill>
                   <a:srgbClr val="22D3EE"/>
                 </a:solidFill>
@@ -11616,7 +11329,7 @@
           <a:bodyPr wrap="square" lIns="0" tIns="0" rIns="0" bIns="0" rtlCol="0" anchor="ctr"/>
           <a:lstStyle/>
           <a:p>
-            <a:pPr indent="0" marL="0">
+            <a:pPr marL="0" indent="0">
               <a:buNone/>
             </a:pPr>
             <a:r>
@@ -11655,7 +11368,7 @@
           <a:bodyPr wrap="square" lIns="0" tIns="0" rIns="0" bIns="0" rtlCol="0" anchor="t"/>
           <a:lstStyle/>
           <a:p>
-            <a:pPr indent="0" marL="0">
+            <a:pPr marL="0" indent="0">
               <a:lnSpc>
                 <a:spcPct val="112000"/>
               </a:lnSpc>
@@ -11702,7 +11415,7 @@
             <a:prstDash val="solid"/>
           </a:ln>
           <a:effectLst>
-            <a:outerShdw sx="100000" sy="100000" kx="0" ky="0" algn="bl" rotWithShape="0" blurRad="114300" dist="50800" dir="5400000">
+            <a:outerShdw blurRad="114300" dist="50800" dir="5400000" algn="bl" rotWithShape="0">
               <a:srgbClr val="000000">
                 <a:alpha val="28000"/>
               </a:srgbClr>
@@ -11756,7 +11469,7 @@
           <a:bodyPr wrap="square" lIns="0" tIns="0" rIns="0" bIns="0" rtlCol="0" anchor="ctr"/>
           <a:lstStyle/>
           <a:p>
-            <a:pPr indent="0" marL="0">
+            <a:pPr marL="0" indent="0">
               <a:buNone/>
             </a:pPr>
             <a:r>
@@ -11795,7 +11508,7 @@
           <a:bodyPr wrap="square" lIns="0" tIns="0" rIns="0" bIns="0" rtlCol="0" anchor="t"/>
           <a:lstStyle/>
           <a:p>
-            <a:pPr indent="0" marL="0">
+            <a:pPr marL="0" indent="0">
               <a:lnSpc>
                 <a:spcPct val="105000"/>
               </a:lnSpc>
@@ -11842,7 +11555,7 @@
             <a:prstDash val="solid"/>
           </a:ln>
           <a:effectLst>
-            <a:outerShdw sx="100000" sy="100000" kx="0" ky="0" algn="bl" rotWithShape="0" blurRad="114300" dist="50800" dir="5400000">
+            <a:outerShdw blurRad="114300" dist="50800" dir="5400000" algn="bl" rotWithShape="0">
               <a:srgbClr val="000000">
                 <a:alpha val="28000"/>
               </a:srgbClr>
@@ -11896,7 +11609,7 @@
           <a:bodyPr wrap="square" lIns="0" tIns="0" rIns="0" bIns="0" rtlCol="0" anchor="ctr"/>
           <a:lstStyle/>
           <a:p>
-            <a:pPr indent="0" marL="0">
+            <a:pPr marL="0" indent="0">
               <a:buNone/>
             </a:pPr>
             <a:r>
@@ -11935,7 +11648,7 @@
           <a:bodyPr wrap="square" lIns="0" tIns="0" rIns="0" bIns="0" rtlCol="0" anchor="t"/>
           <a:lstStyle/>
           <a:p>
-            <a:pPr indent="0" marL="0">
+            <a:pPr marL="0" indent="0">
               <a:lnSpc>
                 <a:spcPct val="105000"/>
               </a:lnSpc>
@@ -11982,7 +11695,7 @@
             <a:prstDash val="solid"/>
           </a:ln>
           <a:effectLst>
-            <a:outerShdw sx="100000" sy="100000" kx="0" ky="0" algn="bl" rotWithShape="0" blurRad="114300" dist="50800" dir="5400000">
+            <a:outerShdw blurRad="114300" dist="50800" dir="5400000" algn="bl" rotWithShape="0">
               <a:srgbClr val="000000">
                 <a:alpha val="28000"/>
               </a:srgbClr>
@@ -12036,7 +11749,7 @@
           <a:bodyPr wrap="square" lIns="0" tIns="0" rIns="0" bIns="0" rtlCol="0" anchor="ctr"/>
           <a:lstStyle/>
           <a:p>
-            <a:pPr indent="0" marL="0">
+            <a:pPr marL="0" indent="0">
               <a:buNone/>
             </a:pPr>
             <a:r>
@@ -12075,7 +11788,7 @@
           <a:bodyPr wrap="square" lIns="0" tIns="0" rIns="0" bIns="0" rtlCol="0" anchor="t"/>
           <a:lstStyle/>
           <a:p>
-            <a:pPr indent="0" marL="0">
+            <a:pPr marL="0" indent="0">
               <a:lnSpc>
                 <a:spcPct val="105000"/>
               </a:lnSpc>
@@ -12112,6 +11825,7 @@
         <a:solidFill>
           <a:srgbClr val="080D20"/>
         </a:solidFill>
+        <a:effectLst/>
       </p:bgPr>
     </p:bg>
     <p:spTree>
@@ -12176,11 +11890,11 @@
           <a:bodyPr wrap="square" lIns="0" tIns="0" rIns="0" bIns="0" rtlCol="0" anchor="ctr"/>
           <a:lstStyle/>
           <a:p>
-            <a:pPr indent="0" marL="0">
-              <a:buNone/>
-            </a:pPr>
-            <a:r>
-              <a:rPr lang="en-US" sz="1100" b="1" spc="300" kern="0" dirty="0">
+            <a:pPr marL="0" indent="0">
+              <a:buNone/>
+            </a:pPr>
+            <a:r>
+              <a:rPr lang="en-US" sz="1100" b="1" kern="0" spc="300" dirty="0">
                 <a:solidFill>
                   <a:srgbClr val="22D3EE"/>
                 </a:solidFill>
@@ -12215,7 +11929,7 @@
           <a:bodyPr wrap="square" lIns="0" tIns="0" rIns="0" bIns="0" rtlCol="0" anchor="ctr"/>
           <a:lstStyle/>
           <a:p>
-            <a:pPr indent="0" marL="0">
+            <a:pPr marL="0" indent="0">
               <a:buNone/>
             </a:pPr>
             <a:r>
@@ -12254,7 +11968,7 @@
           <a:bodyPr wrap="square" lIns="0" tIns="0" rIns="0" bIns="0" rtlCol="0" anchor="ctr"/>
           <a:lstStyle/>
           <a:p>
-            <a:pPr indent="0" marL="0">
+            <a:pPr marL="0" indent="0">
               <a:buNone/>
             </a:pPr>
             <a:r>
@@ -12298,7 +12012,7 @@
             <a:prstDash val="solid"/>
           </a:ln>
           <a:effectLst>
-            <a:outerShdw sx="100000" sy="100000" kx="0" ky="0" algn="bl" rotWithShape="0" blurRad="114300" dist="50800" dir="5400000">
+            <a:outerShdw blurRad="114300" dist="50800" dir="5400000" algn="bl" rotWithShape="0">
               <a:srgbClr val="000000">
                 <a:alpha val="28000"/>
               </a:srgbClr>
@@ -12354,7 +12068,7 @@
           <a:bodyPr wrap="square" lIns="0" tIns="0" rIns="0" bIns="0" rtlCol="0" anchor="ctr"/>
           <a:lstStyle/>
           <a:p>
-            <a:pPr algn="ctr" indent="0" marL="0">
+            <a:pPr marL="0" indent="0" algn="ctr">
               <a:buNone/>
             </a:pPr>
             <a:r>
@@ -12393,7 +12107,7 @@
           <a:bodyPr wrap="square" lIns="0" tIns="0" rIns="0" bIns="0" rtlCol="0" anchor="ctr"/>
           <a:lstStyle/>
           <a:p>
-            <a:pPr indent="0" marL="0">
+            <a:pPr marL="0" indent="0">
               <a:buNone/>
             </a:pPr>
             <a:r>
@@ -12432,7 +12146,7 @@
           <a:bodyPr wrap="square" lIns="0" tIns="0" rIns="0" bIns="0" rtlCol="0" anchor="t"/>
           <a:lstStyle/>
           <a:p>
-            <a:pPr indent="0" marL="0">
+            <a:pPr marL="0" indent="0">
               <a:buNone/>
             </a:pPr>
             <a:r>
@@ -12476,7 +12190,7 @@
             <a:prstDash val="solid"/>
           </a:ln>
           <a:effectLst>
-            <a:outerShdw sx="100000" sy="100000" kx="0" ky="0" algn="bl" rotWithShape="0" blurRad="114300" dist="50800" dir="5400000">
+            <a:outerShdw blurRad="114300" dist="50800" dir="5400000" algn="bl" rotWithShape="0">
               <a:srgbClr val="000000">
                 <a:alpha val="28000"/>
               </a:srgbClr>
@@ -12532,7 +12246,7 @@
           <a:bodyPr wrap="square" lIns="0" tIns="0" rIns="0" bIns="0" rtlCol="0" anchor="ctr"/>
           <a:lstStyle/>
           <a:p>
-            <a:pPr algn="ctr" indent="0" marL="0">
+            <a:pPr marL="0" indent="0" algn="ctr">
               <a:buNone/>
             </a:pPr>
             <a:r>
@@ -12571,7 +12285,7 @@
           <a:bodyPr wrap="square" lIns="0" tIns="0" rIns="0" bIns="0" rtlCol="0" anchor="ctr"/>
           <a:lstStyle/>
           <a:p>
-            <a:pPr indent="0" marL="0">
+            <a:pPr marL="0" indent="0">
               <a:buNone/>
             </a:pPr>
             <a:r>
@@ -12610,7 +12324,7 @@
           <a:bodyPr wrap="square" lIns="0" tIns="0" rIns="0" bIns="0" rtlCol="0" anchor="t"/>
           <a:lstStyle/>
           <a:p>
-            <a:pPr indent="0" marL="0">
+            <a:pPr marL="0" indent="0">
               <a:buNone/>
             </a:pPr>
             <a:r>
@@ -12654,7 +12368,7 @@
             <a:prstDash val="solid"/>
           </a:ln>
           <a:effectLst>
-            <a:outerShdw sx="100000" sy="100000" kx="0" ky="0" algn="bl" rotWithShape="0" blurRad="114300" dist="50800" dir="5400000">
+            <a:outerShdw blurRad="114300" dist="50800" dir="5400000" algn="bl" rotWithShape="0">
               <a:srgbClr val="000000">
                 <a:alpha val="28000"/>
               </a:srgbClr>
@@ -12710,7 +12424,7 @@
           <a:bodyPr wrap="square" lIns="0" tIns="0" rIns="0" bIns="0" rtlCol="0" anchor="ctr"/>
           <a:lstStyle/>
           <a:p>
-            <a:pPr algn="ctr" indent="0" marL="0">
+            <a:pPr marL="0" indent="0" algn="ctr">
               <a:buNone/>
             </a:pPr>
             <a:r>
@@ -12749,7 +12463,7 @@
           <a:bodyPr wrap="square" lIns="0" tIns="0" rIns="0" bIns="0" rtlCol="0" anchor="ctr"/>
           <a:lstStyle/>
           <a:p>
-            <a:pPr indent="0" marL="0">
+            <a:pPr marL="0" indent="0">
               <a:buNone/>
             </a:pPr>
             <a:r>
@@ -12788,7 +12502,7 @@
           <a:bodyPr wrap="square" lIns="0" tIns="0" rIns="0" bIns="0" rtlCol="0" anchor="t"/>
           <a:lstStyle/>
           <a:p>
-            <a:pPr indent="0" marL="0">
+            <a:pPr marL="0" indent="0">
               <a:buNone/>
             </a:pPr>
             <a:r>
@@ -12827,7 +12541,7 @@
           <a:bodyPr wrap="square" lIns="0" tIns="0" rIns="0" bIns="0" rtlCol="0" anchor="ctr"/>
           <a:lstStyle/>
           <a:p>
-            <a:pPr indent="0" marL="0">
+            <a:pPr marL="0" indent="0">
               <a:buNone/>
             </a:pPr>
             <a:r>
@@ -13146,4 +12860,299 @@
     </a:ext>
   </a:extLst>
 </a:theme>
+</file>
+
+<file path=ppt/theme/theme2.xml><?xml version="1.0" encoding="utf-8"?>
+<a:theme xmlns:a="http://schemas.openxmlformats.org/drawingml/2006/main" name="Office Theme">
+  <a:themeElements>
+    <a:clrScheme name="Office">
+      <a:dk1>
+        <a:sysClr val="windowText" lastClr="000000"/>
+      </a:dk1>
+      <a:lt1>
+        <a:sysClr val="window" lastClr="FFFFFF"/>
+      </a:lt1>
+      <a:dk2>
+        <a:srgbClr val="44546A"/>
+      </a:dk2>
+      <a:lt2>
+        <a:srgbClr val="E7E6E6"/>
+      </a:lt2>
+      <a:accent1>
+        <a:srgbClr val="4472C4"/>
+      </a:accent1>
+      <a:accent2>
+        <a:srgbClr val="ED7D31"/>
+      </a:accent2>
+      <a:accent3>
+        <a:srgbClr val="A5A5A5"/>
+      </a:accent3>
+      <a:accent4>
+        <a:srgbClr val="FFC000"/>
+      </a:accent4>
+      <a:accent5>
+        <a:srgbClr val="5B9BD5"/>
+      </a:accent5>
+      <a:accent6>
+        <a:srgbClr val="70AD47"/>
+      </a:accent6>
+      <a:hlink>
+        <a:srgbClr val="0563C1"/>
+      </a:hlink>
+      <a:folHlink>
+        <a:srgbClr val="954F72"/>
+      </a:folHlink>
+    </a:clrScheme>
+    <a:fontScheme name="Office">
+      <a:majorFont>
+        <a:latin typeface="Calibri Light" panose="020F0302020204030204"/>
+        <a:ea typeface=""/>
+        <a:cs typeface=""/>
+        <a:font script="Jpan" typeface="游ゴシック Light"/>
+        <a:font script="Hang" typeface="맑은 고딕"/>
+        <a:font script="Hans" typeface="等线 Light"/>
+        <a:font script="Hant" typeface="新細明體"/>
+        <a:font script="Arab" typeface="Times New Roman"/>
+        <a:font script="Hebr" typeface="Times New Roman"/>
+        <a:font script="Thai" typeface="Angsana New"/>
+        <a:font script="Ethi" typeface="Nyala"/>
+        <a:font script="Beng" typeface="Vrinda"/>
+        <a:font script="Gujr" typeface="Shruti"/>
+        <a:font script="Khmr" typeface="MoolBoran"/>
+        <a:font script="Knda" typeface="Tunga"/>
+        <a:font script="Guru" typeface="Raavi"/>
+        <a:font script="Cans" typeface="Euphemia"/>
+        <a:font script="Cher" typeface="Plantagenet Cherokee"/>
+        <a:font script="Yiii" typeface="Microsoft Yi Baiti"/>
+        <a:font script="Tibt" typeface="Microsoft Himalaya"/>
+        <a:font script="Thaa" typeface="MV Boli"/>
+        <a:font script="Deva" typeface="Mangal"/>
+        <a:font script="Telu" typeface="Gautami"/>
+        <a:font script="Taml" typeface="Latha"/>
+        <a:font script="Syrc" typeface="Estrangelo Edessa"/>
+        <a:font script="Orya" typeface="Kalinga"/>
+        <a:font script="Mlym" typeface="Kartika"/>
+        <a:font script="Laoo" typeface="DokChampa"/>
+        <a:font script="Sinh" typeface="Iskoola Pota"/>
+        <a:font script="Mong" typeface="Mongolian Baiti"/>
+        <a:font script="Viet" typeface="Times New Roman"/>
+        <a:font script="Uigh" typeface="Microsoft Uighur"/>
+        <a:font script="Geor" typeface="Sylfaen"/>
+        <a:font script="Armn" typeface="Arial"/>
+        <a:font script="Bugi" typeface="Leelawadee UI"/>
+        <a:font script="Bopo" typeface="Microsoft JhengHei"/>
+        <a:font script="Java" typeface="Javanese Text"/>
+        <a:font script="Lisu" typeface="Segoe UI"/>
+        <a:font script="Mymr" typeface="Myanmar Text"/>
+        <a:font script="Nkoo" typeface="Ebrima"/>
+        <a:font script="Olck" typeface="Nirmala UI"/>
+        <a:font script="Osma" typeface="Ebrima"/>
+        <a:font script="Phag" typeface="Phagspa"/>
+        <a:font script="Syrn" typeface="Estrangelo Edessa"/>
+        <a:font script="Syrj" typeface="Estrangelo Edessa"/>
+        <a:font script="Syre" typeface="Estrangelo Edessa"/>
+        <a:font script="Sora" typeface="Nirmala UI"/>
+        <a:font script="Tale" typeface="Microsoft Tai Le"/>
+        <a:font script="Talu" typeface="Microsoft New Tai Lue"/>
+        <a:font script="Tfng" typeface="Ebrima"/>
+      </a:majorFont>
+      <a:minorFont>
+        <a:latin typeface="Calibri" panose="020F0502020204030204"/>
+        <a:ea typeface=""/>
+        <a:cs typeface=""/>
+        <a:font script="Jpan" typeface="游ゴシック"/>
+        <a:font script="Hang" typeface="맑은 고딕"/>
+        <a:font script="Hans" typeface="等线"/>
+        <a:font script="Hant" typeface="新細明體"/>
+        <a:font script="Arab" typeface="Arial"/>
+        <a:font script="Hebr" typeface="Arial"/>
+        <a:font script="Thai" typeface="Cordia New"/>
+        <a:font script="Ethi" typeface="Nyala"/>
+        <a:font script="Beng" typeface="Vrinda"/>
+        <a:font script="Gujr" typeface="Shruti"/>
+        <a:font script="Khmr" typeface="DaunPenh"/>
+        <a:font script="Knda" typeface="Tunga"/>
+        <a:font script="Guru" typeface="Raavi"/>
+        <a:font script="Cans" typeface="Euphemia"/>
+        <a:font script="Cher" typeface="Plantagenet Cherokee"/>
+        <a:font script="Yiii" typeface="Microsoft Yi Baiti"/>
+        <a:font script="Tibt" typeface="Microsoft Himalaya"/>
+        <a:font script="Thaa" typeface="MV Boli"/>
+        <a:font script="Deva" typeface="Mangal"/>
+        <a:font script="Telu" typeface="Gautami"/>
+        <a:font script="Taml" typeface="Latha"/>
+        <a:font script="Syrc" typeface="Estrangelo Edessa"/>
+        <a:font script="Orya" typeface="Kalinga"/>
+        <a:font script="Mlym" typeface="Kartika"/>
+        <a:font script="Laoo" typeface="DokChampa"/>
+        <a:font script="Sinh" typeface="Iskoola Pota"/>
+        <a:font script="Mong" typeface="Mongolian Baiti"/>
+        <a:font script="Viet" typeface="Arial"/>
+        <a:font script="Uigh" typeface="Microsoft Uighur"/>
+        <a:font script="Geor" typeface="Sylfaen"/>
+        <a:font script="Armn" typeface="Arial"/>
+        <a:font script="Bugi" typeface="Leelawadee UI"/>
+        <a:font script="Bopo" typeface="Microsoft JhengHei"/>
+        <a:font script="Java" typeface="Javanese Text"/>
+        <a:font script="Lisu" typeface="Segoe UI"/>
+        <a:font script="Mymr" typeface="Myanmar Text"/>
+        <a:font script="Nkoo" typeface="Ebrima"/>
+        <a:font script="Olck" typeface="Nirmala UI"/>
+        <a:font script="Osma" typeface="Ebrima"/>
+        <a:font script="Phag" typeface="Phagspa"/>
+        <a:font script="Syrn" typeface="Estrangelo Edessa"/>
+        <a:font script="Syrj" typeface="Estrangelo Edessa"/>
+        <a:font script="Syre" typeface="Estrangelo Edessa"/>
+        <a:font script="Sora" typeface="Nirmala UI"/>
+        <a:font script="Tale" typeface="Microsoft Tai Le"/>
+        <a:font script="Talu" typeface="Microsoft New Tai Lue"/>
+        <a:font script="Tfng" typeface="Ebrima"/>
+      </a:minorFont>
+    </a:fontScheme>
+    <a:fmtScheme name="Office">
+      <a:fillStyleLst>
+        <a:solidFill>
+          <a:schemeClr val="phClr"/>
+        </a:solidFill>
+        <a:gradFill rotWithShape="1">
+          <a:gsLst>
+            <a:gs pos="0">
+              <a:schemeClr val="phClr">
+                <a:lumMod val="110000"/>
+                <a:satMod val="105000"/>
+                <a:tint val="67000"/>
+              </a:schemeClr>
+            </a:gs>
+            <a:gs pos="50000">
+              <a:schemeClr val="phClr">
+                <a:lumMod val="105000"/>
+                <a:satMod val="103000"/>
+                <a:tint val="73000"/>
+              </a:schemeClr>
+            </a:gs>
+            <a:gs pos="100000">
+              <a:schemeClr val="phClr">
+                <a:lumMod val="105000"/>
+                <a:satMod val="109000"/>
+                <a:tint val="81000"/>
+              </a:schemeClr>
+            </a:gs>
+          </a:gsLst>
+          <a:lin ang="5400000" scaled="0"/>
+        </a:gradFill>
+        <a:gradFill rotWithShape="1">
+          <a:gsLst>
+            <a:gs pos="0">
+              <a:schemeClr val="phClr">
+                <a:satMod val="103000"/>
+                <a:lumMod val="102000"/>
+                <a:tint val="94000"/>
+              </a:schemeClr>
+            </a:gs>
+            <a:gs pos="50000">
+              <a:schemeClr val="phClr">
+                <a:satMod val="110000"/>
+                <a:lumMod val="100000"/>
+                <a:shade val="100000"/>
+              </a:schemeClr>
+            </a:gs>
+            <a:gs pos="100000">
+              <a:schemeClr val="phClr">
+                <a:lumMod val="99000"/>
+                <a:satMod val="120000"/>
+                <a:shade val="78000"/>
+              </a:schemeClr>
+            </a:gs>
+          </a:gsLst>
+          <a:lin ang="5400000" scaled="0"/>
+        </a:gradFill>
+      </a:fillStyleLst>
+      <a:lnStyleLst>
+        <a:ln w="6350" cap="flat" cmpd="sng" algn="ctr">
+          <a:solidFill>
+            <a:schemeClr val="phClr"/>
+          </a:solidFill>
+          <a:prstDash val="solid"/>
+          <a:miter lim="800000"/>
+        </a:ln>
+        <a:ln w="12700" cap="flat" cmpd="sng" algn="ctr">
+          <a:solidFill>
+            <a:schemeClr val="phClr"/>
+          </a:solidFill>
+          <a:prstDash val="solid"/>
+          <a:miter lim="800000"/>
+        </a:ln>
+        <a:ln w="19050" cap="flat" cmpd="sng" algn="ctr">
+          <a:solidFill>
+            <a:schemeClr val="phClr"/>
+          </a:solidFill>
+          <a:prstDash val="solid"/>
+          <a:miter lim="800000"/>
+        </a:ln>
+      </a:lnStyleLst>
+      <a:effectStyleLst>
+        <a:effectStyle>
+          <a:effectLst/>
+        </a:effectStyle>
+        <a:effectStyle>
+          <a:effectLst/>
+        </a:effectStyle>
+        <a:effectStyle>
+          <a:effectLst>
+            <a:outerShdw blurRad="57150" dist="19050" dir="5400000" algn="ctr" rotWithShape="0">
+              <a:srgbClr val="000000">
+                <a:alpha val="63000"/>
+              </a:srgbClr>
+            </a:outerShdw>
+          </a:effectLst>
+        </a:effectStyle>
+      </a:effectStyleLst>
+      <a:bgFillStyleLst>
+        <a:solidFill>
+          <a:schemeClr val="phClr"/>
+        </a:solidFill>
+        <a:solidFill>
+          <a:schemeClr val="phClr">
+            <a:tint val="95000"/>
+            <a:satMod val="170000"/>
+          </a:schemeClr>
+        </a:solidFill>
+        <a:gradFill rotWithShape="1">
+          <a:gsLst>
+            <a:gs pos="0">
+              <a:schemeClr val="phClr">
+                <a:tint val="93000"/>
+                <a:satMod val="150000"/>
+                <a:shade val="98000"/>
+                <a:lumMod val="102000"/>
+              </a:schemeClr>
+            </a:gs>
+            <a:gs pos="50000">
+              <a:schemeClr val="phClr">
+                <a:tint val="98000"/>
+                <a:satMod val="130000"/>
+                <a:shade val="90000"/>
+                <a:lumMod val="103000"/>
+              </a:schemeClr>
+            </a:gs>
+            <a:gs pos="100000">
+              <a:schemeClr val="phClr">
+                <a:shade val="63000"/>
+                <a:satMod val="120000"/>
+              </a:schemeClr>
+            </a:gs>
+          </a:gsLst>
+          <a:lin ang="5400000" scaled="0"/>
+        </a:gradFill>
+      </a:bgFillStyleLst>
+    </a:fmtScheme>
+  </a:themeElements>
+  <a:objectDefaults/>
+  <a:extraClrSchemeLst/>
+  <a:extLst>
+    <a:ext uri="{05A4C25C-085E-4340-85A3-A5531E510DB2}">
+      <thm15:themeFamily xmlns:thm15="http://schemas.microsoft.com/office/thememl/2012/main" name="Office Theme" id="{62F939B6-93AF-4DB8-9C6B-D6C7DFDC589F}" vid="{4A3C46E8-61CC-4603-A589-7422A47A8E4A}"/>
+    </a:ext>
+  </a:extLst>
+</a:theme>
 </file>